--- a/Doc/AI_interny_asistent_10min_prezentacia.pptx
+++ b/Doc/AI_interny_asistent_10min_prezentacia.pptx
@@ -10328,7 +10328,7 @@
         <p:spPr>
           <a:xfrm>
             <a:off x="832104" y="1435607"/>
-            <a:ext cx="2816352" cy="4178808"/>
+            <a:ext cx="2816352" cy="1556836"/>
           </a:xfrm>
           <a:prstGeom prst="rect">
             <a:avLst/>
@@ -10350,6 +10350,7 @@
               </a:defRPr>
             </a:pPr>
             <a:r>
+              <a:rPr dirty="0"/>
               <a:t>Output verifier</a:t>
             </a:r>
           </a:p>
@@ -10366,8 +10367,38 @@
               </a:defRPr>
             </a:pPr>
             <a:r>
-              <a:t>• kontrola tvrdení voči zdrojom</a:t>
-            </a:r>
+              <a:rPr dirty="0"/>
+              <a:t>• </a:t>
+            </a:r>
+            <a:r>
+              <a:rPr dirty="0" err="1"/>
+              <a:t>kontrola</a:t>
+            </a:r>
+            <a:r>
+              <a:rPr dirty="0"/>
+              <a:t> </a:t>
+            </a:r>
+            <a:r>
+              <a:rPr dirty="0" err="1"/>
+              <a:t>tvrdení</a:t>
+            </a:r>
+            <a:r>
+              <a:rPr dirty="0"/>
+              <a:t> </a:t>
+            </a:r>
+            <a:r>
+              <a:rPr dirty="0" err="1"/>
+              <a:t>voči</a:t>
+            </a:r>
+            <a:r>
+              <a:rPr dirty="0"/>
+              <a:t> </a:t>
+            </a:r>
+            <a:r>
+              <a:rPr dirty="0" err="1"/>
+              <a:t>zdrojom</a:t>
+            </a:r>
+            <a:endParaRPr dirty="0"/>
           </a:p>
           <a:p>
             <a:pPr>
@@ -10382,6 +10413,7 @@
               </a:defRPr>
             </a:pPr>
             <a:r>
+              <a:rPr dirty="0"/>
               <a:t>• supported / partial / unsupported</a:t>
             </a:r>
           </a:p>
@@ -10398,8 +10430,54 @@
               </a:defRPr>
             </a:pPr>
             <a:r>
-              <a:t>• citácie nestačia – zdroj musí tvrdenie podporovať</a:t>
-            </a:r>
+              <a:rPr dirty="0"/>
+              <a:t>• </a:t>
+            </a:r>
+            <a:r>
+              <a:rPr dirty="0" err="1"/>
+              <a:t>citácie</a:t>
+            </a:r>
+            <a:r>
+              <a:rPr dirty="0"/>
+              <a:t> </a:t>
+            </a:r>
+            <a:r>
+              <a:rPr dirty="0" err="1"/>
+              <a:t>nestačia</a:t>
+            </a:r>
+            <a:r>
+              <a:rPr dirty="0"/>
+              <a:t> – </a:t>
+            </a:r>
+            <a:r>
+              <a:rPr dirty="0" err="1"/>
+              <a:t>zdroj</a:t>
+            </a:r>
+            <a:r>
+              <a:rPr dirty="0"/>
+              <a:t> </a:t>
+            </a:r>
+            <a:r>
+              <a:rPr dirty="0" err="1"/>
+              <a:t>musí</a:t>
+            </a:r>
+            <a:r>
+              <a:rPr dirty="0"/>
+              <a:t> </a:t>
+            </a:r>
+            <a:r>
+              <a:rPr dirty="0" err="1"/>
+              <a:t>tvrdenie</a:t>
+            </a:r>
+            <a:r>
+              <a:rPr dirty="0"/>
+              <a:t> </a:t>
+            </a:r>
+            <a:r>
+              <a:rPr dirty="0" err="1"/>
+              <a:t>podporovať</a:t>
+            </a:r>
+            <a:endParaRPr dirty="0"/>
           </a:p>
           <a:p>
             <a:pPr>
@@ -10414,8 +10492,76 @@
               </a:defRPr>
             </a:pPr>
             <a:r>
-              <a:t>• ak chýba zdroj, systém prizná limit</a:t>
-            </a:r>
+              <a:rPr dirty="0"/>
+              <a:t>• </a:t>
+            </a:r>
+            <a:r>
+              <a:rPr dirty="0" err="1"/>
+              <a:t>ak</a:t>
+            </a:r>
+            <a:r>
+              <a:rPr dirty="0"/>
+              <a:t> </a:t>
+            </a:r>
+            <a:r>
+              <a:rPr dirty="0" err="1"/>
+              <a:t>chýba</a:t>
+            </a:r>
+            <a:r>
+              <a:rPr dirty="0"/>
+              <a:t> </a:t>
+            </a:r>
+            <a:r>
+              <a:rPr dirty="0" err="1"/>
+              <a:t>zdroj</a:t>
+            </a:r>
+            <a:r>
+              <a:rPr dirty="0"/>
+              <a:t>, </a:t>
+            </a:r>
+            <a:r>
+              <a:rPr dirty="0" err="1"/>
+              <a:t>systém</a:t>
+            </a:r>
+            <a:r>
+              <a:rPr dirty="0"/>
+              <a:t> </a:t>
+            </a:r>
+            <a:r>
+              <a:rPr dirty="0" err="1"/>
+              <a:t>prizná</a:t>
+            </a:r>
+            <a:r>
+              <a:rPr dirty="0"/>
+              <a:t> l</a:t>
+            </a:r>
+            <a:r>
+              <a:rPr lang="en-US" dirty="0"/>
+              <a:t>imit</a:t>
+            </a:r>
+            <a:endParaRPr lang="sk-SK" dirty="0"/>
+          </a:p>
+          <a:p>
+            <a:pPr>
+              <a:spcAft>
+                <a:spcPts val="200"/>
+              </a:spcAft>
+              <a:defRPr sz="1250">
+                <a:solidFill>
+                  <a:srgbClr val="0F172A"/>
+                </a:solidFill>
+                <a:latin typeface="Arial"/>
+              </a:defRPr>
+            </a:pPr>
+            <a:r>
+              <a:rPr lang="en-US" dirty="0"/>
+              <a:t>• Pou</a:t>
+            </a:r>
+            <a:r>
+              <a:rPr lang="sk-SK" dirty="0"/>
+              <a:t>žiť aj pri cache odpovedi</a:t>
+            </a:r>
+            <a:endParaRPr lang="en-US" dirty="0"/>
           </a:p>
         </p:txBody>
       </p:sp>
@@ -10474,7 +10620,7 @@
         <p:spPr>
           <a:xfrm>
             <a:off x="4306824" y="1435607"/>
-            <a:ext cx="2999232" cy="4178808"/>
+            <a:ext cx="2999232" cy="2428870"/>
           </a:xfrm>
           <a:prstGeom prst="rect">
             <a:avLst/>
@@ -10496,8 +10642,14 @@
               </a:defRPr>
             </a:pPr>
             <a:r>
-              <a:t>Scoring dimenzie</a:t>
-            </a:r>
+              <a:rPr dirty="0"/>
+              <a:t>Scoring </a:t>
+            </a:r>
+            <a:r>
+              <a:rPr dirty="0" err="1"/>
+              <a:t>dimenzie</a:t>
+            </a:r>
+            <a:endParaRPr dirty="0"/>
           </a:p>
           <a:p>
             <a:pPr>
@@ -10512,8 +10664,14 @@
               </a:defRPr>
             </a:pPr>
             <a:r>
-              <a:t>• groundedness</a:t>
-            </a:r>
+              <a:rPr dirty="0"/>
+              <a:t>• </a:t>
+            </a:r>
+            <a:r>
+              <a:rPr dirty="0" err="1"/>
+              <a:t>groundedness</a:t>
+            </a:r>
+            <a:endParaRPr dirty="0"/>
           </a:p>
           <a:p>
             <a:pPr>
@@ -10528,6 +10686,7 @@
               </a:defRPr>
             </a:pPr>
             <a:r>
+              <a:rPr dirty="0"/>
               <a:t>• source coverage</a:t>
             </a:r>
           </a:p>
@@ -10544,6 +10703,7 @@
               </a:defRPr>
             </a:pPr>
             <a:r>
+              <a:rPr dirty="0"/>
               <a:t>• authorization risk</a:t>
             </a:r>
           </a:p>
@@ -10560,6 +10720,7 @@
               </a:defRPr>
             </a:pPr>
             <a:r>
+              <a:rPr dirty="0"/>
               <a:t>• prompt injection risk</a:t>
             </a:r>
           </a:p>
@@ -10576,6 +10737,7 @@
               </a:defRPr>
             </a:pPr>
             <a:r>
+              <a:rPr dirty="0"/>
               <a:t>• PII/data leakage risk</a:t>
             </a:r>
           </a:p>
@@ -10592,6 +10754,7 @@
               </a:defRPr>
             </a:pPr>
             <a:r>
+              <a:rPr dirty="0"/>
               <a:t>• business criticality</a:t>
             </a:r>
           </a:p>
@@ -10608,8 +10771,47 @@
               </a:defRPr>
             </a:pPr>
             <a:r>
+              <a:rPr dirty="0"/>
               <a:t>• answer completeness</a:t>
             </a:r>
+            <a:endParaRPr lang="sk-SK" dirty="0"/>
+          </a:p>
+          <a:p>
+            <a:pPr>
+              <a:spcAft>
+                <a:spcPts val="200"/>
+              </a:spcAft>
+              <a:defRPr sz="1250">
+                <a:solidFill>
+                  <a:srgbClr val="0F172A"/>
+                </a:solidFill>
+                <a:latin typeface="Arial"/>
+              </a:defRPr>
+            </a:pPr>
+            <a:r>
+              <a:rPr lang="en-US" dirty="0"/>
+              <a:t>•</a:t>
+            </a:r>
+            <a:r>
+              <a:rPr lang="sk-SK" dirty="0"/>
+              <a:t>  feedback používateľa pre cache odpovede</a:t>
+            </a:r>
+          </a:p>
+          <a:p>
+            <a:pPr marL="285750" indent="-285750">
+              <a:spcAft>
+                <a:spcPts val="200"/>
+              </a:spcAft>
+              <a:buFont typeface="Arial" panose="020B0604020202020204" pitchFamily="34" charset="0"/>
+              <a:buChar char="•"/>
+              <a:defRPr sz="1250">
+                <a:solidFill>
+                  <a:srgbClr val="0F172A"/>
+                </a:solidFill>
+                <a:latin typeface="Arial"/>
+              </a:defRPr>
+            </a:pPr>
+            <a:endParaRPr dirty="0"/>
           </a:p>
         </p:txBody>
       </p:sp>

--- a/Doc/AI_interny_asistent_10min_prezentacia.pptx
+++ b/Doc/AI_interny_asistent_10min_prezentacia.pptx
@@ -4,6 +4,9 @@
   <p:sldMasterIdLst>
     <p:sldMasterId id="2147483648" r:id="rId1"/>
   </p:sldMasterIdLst>
+  <p:notesMasterIdLst>
+    <p:notesMasterId r:id="rId12"/>
+  </p:notesMasterIdLst>
   <p:sldIdLst>
     <p:sldId id="256" r:id="rId2"/>
     <p:sldId id="257" r:id="rId3"/>
@@ -130,6 +133,439 @@
     </p:ext>
   </p:extLst>
 </p:presentation>
+</file>
+
+<file path=ppt/notesMasters/notesMaster1.xml><?xml version="1.0" encoding="utf-8"?>
+<p:notesMaster xmlns:a="http://schemas.openxmlformats.org/drawingml/2006/main" xmlns:r="http://schemas.openxmlformats.org/officeDocument/2006/relationships" xmlns:p="http://schemas.openxmlformats.org/presentationml/2006/main">
+  <p:cSld>
+    <p:bg>
+      <p:bgRef idx="1001">
+        <a:schemeClr val="bg1"/>
+      </p:bgRef>
+    </p:bg>
+    <p:spTree>
+      <p:nvGrpSpPr>
+        <p:cNvPr id="1" name=""/>
+        <p:cNvGrpSpPr/>
+        <p:nvPr/>
+      </p:nvGrpSpPr>
+      <p:grpSpPr>
+        <a:xfrm>
+          <a:off x="0" y="0"/>
+          <a:ext cx="0" cy="0"/>
+          <a:chOff x="0" y="0"/>
+          <a:chExt cx="0" cy="0"/>
+        </a:xfrm>
+      </p:grpSpPr>
+      <p:sp>
+        <p:nvSpPr>
+          <p:cNvPr id="2" name="Header Placeholder 1"/>
+          <p:cNvSpPr>
+            <a:spLocks noGrp="1"/>
+          </p:cNvSpPr>
+          <p:nvPr>
+            <p:ph type="hdr" sz="quarter"/>
+          </p:nvPr>
+        </p:nvSpPr>
+        <p:spPr>
+          <a:xfrm>
+            <a:off x="0" y="0"/>
+            <a:ext cx="2971800" cy="458788"/>
+          </a:xfrm>
+          <a:prstGeom prst="rect">
+            <a:avLst/>
+          </a:prstGeom>
+        </p:spPr>
+        <p:txBody>
+          <a:bodyPr vert="horz" lIns="91440" tIns="45720" rIns="91440" bIns="45720" rtlCol="0"/>
+          <a:lstStyle>
+            <a:lvl1pPr algn="l">
+              <a:defRPr sz="1200"/>
+            </a:lvl1pPr>
+          </a:lstStyle>
+          <a:p>
+            <a:endParaRPr lang="en-US"/>
+          </a:p>
+        </p:txBody>
+      </p:sp>
+      <p:sp>
+        <p:nvSpPr>
+          <p:cNvPr id="3" name="Date Placeholder 2"/>
+          <p:cNvSpPr>
+            <a:spLocks noGrp="1"/>
+          </p:cNvSpPr>
+          <p:nvPr>
+            <p:ph type="dt" idx="1"/>
+          </p:nvPr>
+        </p:nvSpPr>
+        <p:spPr>
+          <a:xfrm>
+            <a:off x="3884613" y="0"/>
+            <a:ext cx="2971800" cy="458788"/>
+          </a:xfrm>
+          <a:prstGeom prst="rect">
+            <a:avLst/>
+          </a:prstGeom>
+        </p:spPr>
+        <p:txBody>
+          <a:bodyPr vert="horz" lIns="91440" tIns="45720" rIns="91440" bIns="45720" rtlCol="0"/>
+          <a:lstStyle>
+            <a:lvl1pPr algn="r">
+              <a:defRPr sz="1200"/>
+            </a:lvl1pPr>
+          </a:lstStyle>
+          <a:p>
+            <a:fld id="{BCEBB114-AB61-4334-A98E-3570E23ECE30}" type="datetimeFigureOut">
+              <a:rPr lang="en-US" smtClean="0"/>
+              <a:t>5/25/2026</a:t>
+            </a:fld>
+            <a:endParaRPr lang="en-US"/>
+          </a:p>
+        </p:txBody>
+      </p:sp>
+      <p:sp>
+        <p:nvSpPr>
+          <p:cNvPr id="4" name="Slide Image Placeholder 3"/>
+          <p:cNvSpPr>
+            <a:spLocks noGrp="1" noRot="1" noChangeAspect="1"/>
+          </p:cNvSpPr>
+          <p:nvPr>
+            <p:ph type="sldImg" idx="2"/>
+          </p:nvPr>
+        </p:nvSpPr>
+        <p:spPr>
+          <a:xfrm>
+            <a:off x="685800" y="1143000"/>
+            <a:ext cx="5486400" cy="3086100"/>
+          </a:xfrm>
+          <a:prstGeom prst="rect">
+            <a:avLst/>
+          </a:prstGeom>
+          <a:noFill/>
+          <a:ln w="12700">
+            <a:solidFill>
+              <a:prstClr val="black"/>
+            </a:solidFill>
+          </a:ln>
+        </p:spPr>
+        <p:txBody>
+          <a:bodyPr vert="horz" lIns="91440" tIns="45720" rIns="91440" bIns="45720" rtlCol="0" anchor="ctr"/>
+          <a:lstStyle/>
+          <a:p>
+            <a:endParaRPr lang="en-US"/>
+          </a:p>
+        </p:txBody>
+      </p:sp>
+      <p:sp>
+        <p:nvSpPr>
+          <p:cNvPr id="5" name="Notes Placeholder 4"/>
+          <p:cNvSpPr>
+            <a:spLocks noGrp="1"/>
+          </p:cNvSpPr>
+          <p:nvPr>
+            <p:ph type="body" sz="quarter" idx="3"/>
+          </p:nvPr>
+        </p:nvSpPr>
+        <p:spPr>
+          <a:xfrm>
+            <a:off x="685800" y="4400550"/>
+            <a:ext cx="5486400" cy="3600450"/>
+          </a:xfrm>
+          <a:prstGeom prst="rect">
+            <a:avLst/>
+          </a:prstGeom>
+        </p:spPr>
+        <p:txBody>
+          <a:bodyPr vert="horz" lIns="91440" tIns="45720" rIns="91440" bIns="45720" rtlCol="0"/>
+          <a:lstStyle/>
+          <a:p>
+            <a:pPr lvl="0"/>
+            <a:r>
+              <a:rPr lang="en-US"/>
+              <a:t>Click to edit Master text styles</a:t>
+            </a:r>
+          </a:p>
+          <a:p>
+            <a:pPr lvl="1"/>
+            <a:r>
+              <a:rPr lang="en-US"/>
+              <a:t>Second level</a:t>
+            </a:r>
+          </a:p>
+          <a:p>
+            <a:pPr lvl="2"/>
+            <a:r>
+              <a:rPr lang="en-US"/>
+              <a:t>Third level</a:t>
+            </a:r>
+          </a:p>
+          <a:p>
+            <a:pPr lvl="3"/>
+            <a:r>
+              <a:rPr lang="en-US"/>
+              <a:t>Fourth level</a:t>
+            </a:r>
+          </a:p>
+          <a:p>
+            <a:pPr lvl="4"/>
+            <a:r>
+              <a:rPr lang="en-US"/>
+              <a:t>Fifth level</a:t>
+            </a:r>
+          </a:p>
+        </p:txBody>
+      </p:sp>
+      <p:sp>
+        <p:nvSpPr>
+          <p:cNvPr id="6" name="Footer Placeholder 5"/>
+          <p:cNvSpPr>
+            <a:spLocks noGrp="1"/>
+          </p:cNvSpPr>
+          <p:nvPr>
+            <p:ph type="ftr" sz="quarter" idx="4"/>
+          </p:nvPr>
+        </p:nvSpPr>
+        <p:spPr>
+          <a:xfrm>
+            <a:off x="0" y="8685213"/>
+            <a:ext cx="2971800" cy="458787"/>
+          </a:xfrm>
+          <a:prstGeom prst="rect">
+            <a:avLst/>
+          </a:prstGeom>
+        </p:spPr>
+        <p:txBody>
+          <a:bodyPr vert="horz" lIns="91440" tIns="45720" rIns="91440" bIns="45720" rtlCol="0" anchor="b"/>
+          <a:lstStyle>
+            <a:lvl1pPr algn="l">
+              <a:defRPr sz="1200"/>
+            </a:lvl1pPr>
+          </a:lstStyle>
+          <a:p>
+            <a:endParaRPr lang="en-US"/>
+          </a:p>
+        </p:txBody>
+      </p:sp>
+      <p:sp>
+        <p:nvSpPr>
+          <p:cNvPr id="7" name="Slide Number Placeholder 6"/>
+          <p:cNvSpPr>
+            <a:spLocks noGrp="1"/>
+          </p:cNvSpPr>
+          <p:nvPr>
+            <p:ph type="sldNum" sz="quarter" idx="5"/>
+          </p:nvPr>
+        </p:nvSpPr>
+        <p:spPr>
+          <a:xfrm>
+            <a:off x="3884613" y="8685213"/>
+            <a:ext cx="2971800" cy="458787"/>
+          </a:xfrm>
+          <a:prstGeom prst="rect">
+            <a:avLst/>
+          </a:prstGeom>
+        </p:spPr>
+        <p:txBody>
+          <a:bodyPr vert="horz" lIns="91440" tIns="45720" rIns="91440" bIns="45720" rtlCol="0" anchor="b"/>
+          <a:lstStyle>
+            <a:lvl1pPr algn="r">
+              <a:defRPr sz="1200"/>
+            </a:lvl1pPr>
+          </a:lstStyle>
+          <a:p>
+            <a:fld id="{D574C039-4C3F-4A0E-B86E-775EAB413F75}" type="slidenum">
+              <a:rPr lang="en-US" smtClean="0"/>
+              <a:t>‹#›</a:t>
+            </a:fld>
+            <a:endParaRPr lang="en-US"/>
+          </a:p>
+        </p:txBody>
+      </p:sp>
+    </p:spTree>
+    <p:extLst>
+      <p:ext uri="{BB962C8B-B14F-4D97-AF65-F5344CB8AC3E}">
+        <p14:creationId xmlns:p14="http://schemas.microsoft.com/office/powerpoint/2010/main" val="4130604674"/>
+      </p:ext>
+    </p:extLst>
+  </p:cSld>
+  <p:clrMap bg1="lt1" tx1="dk1" bg2="lt2" tx2="dk2" accent1="accent1" accent2="accent2" accent3="accent3" accent4="accent4" accent5="accent5" accent6="accent6" hlink="hlink" folHlink="folHlink"/>
+  <p:notesStyle>
+    <a:lvl1pPr marL="0" algn="l" defTabSz="914400" rtl="0" eaLnBrk="1" latinLnBrk="0" hangingPunct="1">
+      <a:defRPr sz="1200" kern="1200">
+        <a:solidFill>
+          <a:schemeClr val="tx1"/>
+        </a:solidFill>
+        <a:latin typeface="+mn-lt"/>
+        <a:ea typeface="+mn-ea"/>
+        <a:cs typeface="+mn-cs"/>
+      </a:defRPr>
+    </a:lvl1pPr>
+    <a:lvl2pPr marL="457200" algn="l" defTabSz="914400" rtl="0" eaLnBrk="1" latinLnBrk="0" hangingPunct="1">
+      <a:defRPr sz="1200" kern="1200">
+        <a:solidFill>
+          <a:schemeClr val="tx1"/>
+        </a:solidFill>
+        <a:latin typeface="+mn-lt"/>
+        <a:ea typeface="+mn-ea"/>
+        <a:cs typeface="+mn-cs"/>
+      </a:defRPr>
+    </a:lvl2pPr>
+    <a:lvl3pPr marL="914400" algn="l" defTabSz="914400" rtl="0" eaLnBrk="1" latinLnBrk="0" hangingPunct="1">
+      <a:defRPr sz="1200" kern="1200">
+        <a:solidFill>
+          <a:schemeClr val="tx1"/>
+        </a:solidFill>
+        <a:latin typeface="+mn-lt"/>
+        <a:ea typeface="+mn-ea"/>
+        <a:cs typeface="+mn-cs"/>
+      </a:defRPr>
+    </a:lvl3pPr>
+    <a:lvl4pPr marL="1371600" algn="l" defTabSz="914400" rtl="0" eaLnBrk="1" latinLnBrk="0" hangingPunct="1">
+      <a:defRPr sz="1200" kern="1200">
+        <a:solidFill>
+          <a:schemeClr val="tx1"/>
+        </a:solidFill>
+        <a:latin typeface="+mn-lt"/>
+        <a:ea typeface="+mn-ea"/>
+        <a:cs typeface="+mn-cs"/>
+      </a:defRPr>
+    </a:lvl4pPr>
+    <a:lvl5pPr marL="1828800" algn="l" defTabSz="914400" rtl="0" eaLnBrk="1" latinLnBrk="0" hangingPunct="1">
+      <a:defRPr sz="1200" kern="1200">
+        <a:solidFill>
+          <a:schemeClr val="tx1"/>
+        </a:solidFill>
+        <a:latin typeface="+mn-lt"/>
+        <a:ea typeface="+mn-ea"/>
+        <a:cs typeface="+mn-cs"/>
+      </a:defRPr>
+    </a:lvl5pPr>
+    <a:lvl6pPr marL="2286000" algn="l" defTabSz="914400" rtl="0" eaLnBrk="1" latinLnBrk="0" hangingPunct="1">
+      <a:defRPr sz="1200" kern="1200">
+        <a:solidFill>
+          <a:schemeClr val="tx1"/>
+        </a:solidFill>
+        <a:latin typeface="+mn-lt"/>
+        <a:ea typeface="+mn-ea"/>
+        <a:cs typeface="+mn-cs"/>
+      </a:defRPr>
+    </a:lvl6pPr>
+    <a:lvl7pPr marL="2743200" algn="l" defTabSz="914400" rtl="0" eaLnBrk="1" latinLnBrk="0" hangingPunct="1">
+      <a:defRPr sz="1200" kern="1200">
+        <a:solidFill>
+          <a:schemeClr val="tx1"/>
+        </a:solidFill>
+        <a:latin typeface="+mn-lt"/>
+        <a:ea typeface="+mn-ea"/>
+        <a:cs typeface="+mn-cs"/>
+      </a:defRPr>
+    </a:lvl7pPr>
+    <a:lvl8pPr marL="3200400" algn="l" defTabSz="914400" rtl="0" eaLnBrk="1" latinLnBrk="0" hangingPunct="1">
+      <a:defRPr sz="1200" kern="1200">
+        <a:solidFill>
+          <a:schemeClr val="tx1"/>
+        </a:solidFill>
+        <a:latin typeface="+mn-lt"/>
+        <a:ea typeface="+mn-ea"/>
+        <a:cs typeface="+mn-cs"/>
+      </a:defRPr>
+    </a:lvl8pPr>
+    <a:lvl9pPr marL="3657600" algn="l" defTabSz="914400" rtl="0" eaLnBrk="1" latinLnBrk="0" hangingPunct="1">
+      <a:defRPr sz="1200" kern="1200">
+        <a:solidFill>
+          <a:schemeClr val="tx1"/>
+        </a:solidFill>
+        <a:latin typeface="+mn-lt"/>
+        <a:ea typeface="+mn-ea"/>
+        <a:cs typeface="+mn-cs"/>
+      </a:defRPr>
+    </a:lvl9pPr>
+  </p:notesStyle>
+</p:notesMaster>
+</file>
+
+<file path=ppt/notesSlides/notesSlide1.xml><?xml version="1.0" encoding="utf-8"?>
+<p:notes xmlns:a="http://schemas.openxmlformats.org/drawingml/2006/main" xmlns:r="http://schemas.openxmlformats.org/officeDocument/2006/relationships" xmlns:p="http://schemas.openxmlformats.org/presentationml/2006/main">
+  <p:cSld>
+    <p:spTree>
+      <p:nvGrpSpPr>
+        <p:cNvPr id="1" name=""/>
+        <p:cNvGrpSpPr/>
+        <p:nvPr/>
+      </p:nvGrpSpPr>
+      <p:grpSpPr>
+        <a:xfrm>
+          <a:off x="0" y="0"/>
+          <a:ext cx="0" cy="0"/>
+          <a:chOff x="0" y="0"/>
+          <a:chExt cx="0" cy="0"/>
+        </a:xfrm>
+      </p:grpSpPr>
+      <p:sp>
+        <p:nvSpPr>
+          <p:cNvPr id="2" name="Slide Image Placeholder 1"/>
+          <p:cNvSpPr>
+            <a:spLocks noGrp="1" noRot="1" noChangeAspect="1"/>
+          </p:cNvSpPr>
+          <p:nvPr>
+            <p:ph type="sldImg"/>
+          </p:nvPr>
+        </p:nvSpPr>
+        <p:spPr/>
+      </p:sp>
+      <p:sp>
+        <p:nvSpPr>
+          <p:cNvPr id="3" name="Notes Placeholder 2"/>
+          <p:cNvSpPr>
+            <a:spLocks noGrp="1"/>
+          </p:cNvSpPr>
+          <p:nvPr>
+            <p:ph type="body" idx="1"/>
+          </p:nvPr>
+        </p:nvSpPr>
+        <p:spPr/>
+        <p:txBody>
+          <a:bodyPr/>
+          <a:lstStyle/>
+          <a:p>
+            <a:endParaRPr lang="en-US"/>
+          </a:p>
+        </p:txBody>
+      </p:sp>
+      <p:sp>
+        <p:nvSpPr>
+          <p:cNvPr id="4" name="Slide Number Placeholder 3"/>
+          <p:cNvSpPr>
+            <a:spLocks noGrp="1"/>
+          </p:cNvSpPr>
+          <p:nvPr>
+            <p:ph type="sldNum" sz="quarter" idx="5"/>
+          </p:nvPr>
+        </p:nvSpPr>
+        <p:spPr/>
+        <p:txBody>
+          <a:bodyPr/>
+          <a:lstStyle/>
+          <a:p>
+            <a:fld id="{D574C039-4C3F-4A0E-B86E-775EAB413F75}" type="slidenum">
+              <a:rPr lang="en-US" smtClean="0"/>
+              <a:t>1</a:t>
+            </a:fld>
+            <a:endParaRPr lang="en-US"/>
+          </a:p>
+        </p:txBody>
+      </p:sp>
+    </p:spTree>
+    <p:extLst>
+      <p:ext uri="{BB962C8B-B14F-4D97-AF65-F5344CB8AC3E}">
+        <p14:creationId xmlns:p14="http://schemas.microsoft.com/office/powerpoint/2010/main" val="4054115360"/>
+      </p:ext>
+    </p:extLst>
+  </p:cSld>
+  <p:clrMapOvr>
+    <a:masterClrMapping/>
+  </p:clrMapOvr>
+</p:notes>
 </file>
 
 <file path=ppt/slideLayouts/slideLayout1.xml><?xml version="1.0" encoding="utf-8"?>
@@ -3639,7 +4075,7 @@
         <p:spPr>
           <a:xfrm>
             <a:off x="713232" y="5166360"/>
-            <a:ext cx="10881360" cy="502920"/>
+            <a:ext cx="10881360" cy="507831"/>
           </a:xfrm>
           <a:prstGeom prst="rect">
             <a:avLst/>
@@ -3661,7 +4097,152 @@
               </a:defRPr>
             </a:pPr>
             <a:r>
-              <a:t>Použitie AI pri príprave: ako sparring partner na štruktúru, alternatívy, riziká a kontrolu konzistencie. Finálne rozhodnutia a zodpovednosť sú moje.</a:t>
+              <a:rPr dirty="0" err="1"/>
+              <a:t>Použitie</a:t>
+            </a:r>
+            <a:r>
+              <a:rPr dirty="0"/>
+              <a:t> AI</a:t>
+            </a:r>
+            <a:r>
+              <a:rPr lang="en-US" dirty="0"/>
+              <a:t> (</a:t>
+            </a:r>
+            <a:r>
+              <a:rPr lang="en-US" dirty="0" err="1"/>
+              <a:t>Gpt</a:t>
+            </a:r>
+            <a:r>
+              <a:rPr lang="en-US"/>
+              <a:t>/Codex</a:t>
+            </a:r>
+            <a:r>
+              <a:rPr lang="en-US" dirty="0"/>
+              <a:t>)</a:t>
+            </a:r>
+            <a:r>
+              <a:rPr dirty="0"/>
+              <a:t> </a:t>
+            </a:r>
+            <a:r>
+              <a:rPr dirty="0" err="1"/>
+              <a:t>pri</a:t>
+            </a:r>
+            <a:r>
+              <a:rPr dirty="0"/>
+              <a:t> </a:t>
+            </a:r>
+            <a:r>
+              <a:rPr dirty="0" err="1"/>
+              <a:t>príprave</a:t>
+            </a:r>
+            <a:r>
+              <a:rPr lang="en-US" dirty="0"/>
+              <a:t> </a:t>
+            </a:r>
+            <a:r>
+              <a:rPr dirty="0" err="1"/>
+              <a:t>na</a:t>
+            </a:r>
+            <a:r>
+              <a:rPr lang="en-US" dirty="0"/>
+              <a:t> </a:t>
+            </a:r>
+            <a:r>
+              <a:rPr lang="en-US" dirty="0" err="1"/>
+              <a:t>validaciu</a:t>
+            </a:r>
+            <a:r>
+              <a:rPr dirty="0"/>
+              <a:t> </a:t>
+            </a:r>
+            <a:r>
+              <a:rPr dirty="0" err="1"/>
+              <a:t>štruktúr</a:t>
+            </a:r>
+            <a:r>
+              <a:rPr lang="en-US" dirty="0" err="1"/>
+              <a:t>y</a:t>
+            </a:r>
+            <a:r>
+              <a:rPr dirty="0"/>
+              <a:t>, </a:t>
+            </a:r>
+            <a:r>
+              <a:rPr lang="en-US" dirty="0"/>
+              <a:t>UX,  </a:t>
+            </a:r>
+            <a:r>
+              <a:rPr dirty="0" err="1"/>
+              <a:t>alternatívy</a:t>
+            </a:r>
+            <a:r>
+              <a:rPr dirty="0"/>
+              <a:t>, </a:t>
+            </a:r>
+            <a:r>
+              <a:rPr dirty="0" err="1"/>
+              <a:t>riziká</a:t>
+            </a:r>
+            <a:r>
+              <a:rPr dirty="0"/>
+              <a:t> a </a:t>
+            </a:r>
+            <a:r>
+              <a:rPr dirty="0" err="1"/>
+              <a:t>kontrolu</a:t>
+            </a:r>
+            <a:r>
+              <a:rPr dirty="0"/>
+              <a:t> </a:t>
+            </a:r>
+            <a:r>
+              <a:rPr dirty="0" err="1"/>
+              <a:t>konzistencie</a:t>
+            </a:r>
+            <a:r>
+              <a:rPr dirty="0"/>
+              <a:t>. </a:t>
+            </a:r>
+            <a:r>
+              <a:rPr dirty="0" err="1"/>
+              <a:t>Finálne</a:t>
+            </a:r>
+            <a:r>
+              <a:rPr dirty="0"/>
+              <a:t> </a:t>
+            </a:r>
+            <a:r>
+              <a:rPr dirty="0" err="1"/>
+              <a:t>rozhodnutia</a:t>
+            </a:r>
+            <a:r>
+              <a:rPr dirty="0"/>
+              <a:t> a </a:t>
+            </a:r>
+            <a:r>
+              <a:rPr dirty="0" err="1"/>
+              <a:t>zodpovednosť</a:t>
+            </a:r>
+            <a:r>
+              <a:rPr dirty="0"/>
+              <a:t> </a:t>
+            </a:r>
+            <a:r>
+              <a:rPr dirty="0" err="1"/>
+              <a:t>sú</a:t>
+            </a:r>
+            <a:r>
+              <a:rPr dirty="0"/>
+              <a:t> </a:t>
+            </a:r>
+            <a:r>
+              <a:rPr dirty="0" err="1"/>
+              <a:t>moje</a:t>
+            </a:r>
+            <a:r>
+              <a:rPr dirty="0"/>
+              <a:t>.</a:t>
             </a:r>
           </a:p>
         </p:txBody>
@@ -4108,24 +4689,12 @@
               <a:t> bez </a:t>
             </a:r>
             <a:r>
-              <a:rPr lang="en-US" dirty="0" err="1"/>
-              <a:t>overenia</a:t>
-            </a:r>
-            <a:r>
-              <a:rPr lang="en-US" dirty="0"/>
-              <a:t> </a:t>
-            </a:r>
-            <a:r>
-              <a:rPr lang="en-US" dirty="0" err="1"/>
-              <a:t>zdrojovej</a:t>
-            </a:r>
-            <a:r>
-              <a:rPr lang="en-US" dirty="0"/>
-              <a:t> </a:t>
-            </a:r>
-            <a:r>
-              <a:rPr lang="en-US" dirty="0" err="1"/>
-              <a:t>opory</a:t>
+              <a:rPr lang="sk-SK" dirty="0" err="1"/>
+              <a:t>overeneho</a:t>
+            </a:r>
+            <a:r>
+              <a:rPr lang="sk-SK" dirty="0"/>
+              <a:t> zdroja</a:t>
             </a:r>
             <a:endParaRPr lang="en-US" dirty="0"/>
           </a:p>
@@ -4278,7 +4847,7 @@
         <p:spPr>
           <a:xfrm>
             <a:off x="6409944" y="1527048"/>
-            <a:ext cx="4965192" cy="3630168"/>
+            <a:ext cx="4965192" cy="1582484"/>
           </a:xfrm>
           <a:prstGeom prst="rect">
             <a:avLst/>
@@ -4300,8 +4869,22 @@
               </a:defRPr>
             </a:pPr>
             <a:r>
-              <a:t>Pred produkciou overiť</a:t>
-            </a:r>
+              <a:rPr dirty="0"/>
+              <a:t>Pred </a:t>
+            </a:r>
+            <a:r>
+              <a:rPr dirty="0" err="1"/>
+              <a:t>produkciou</a:t>
+            </a:r>
+            <a:r>
+              <a:rPr dirty="0"/>
+              <a:t> </a:t>
+            </a:r>
+            <a:r>
+              <a:rPr dirty="0" err="1"/>
+              <a:t>overiť</a:t>
+            </a:r>
+            <a:endParaRPr dirty="0"/>
           </a:p>
           <a:p>
             <a:pPr>
@@ -4316,8 +4899,18 @@
               </a:defRPr>
             </a:pPr>
             <a:r>
-              <a:t>• negatívne testy oprávnení</a:t>
-            </a:r>
+              <a:rPr dirty="0"/>
+              <a:t>• testy </a:t>
+            </a:r>
+            <a:r>
+              <a:rPr dirty="0" err="1"/>
+              <a:t>oprávnení</a:t>
+            </a:r>
+            <a:r>
+              <a:rPr lang="sk-SK" dirty="0"/>
+              <a:t> k zdrojom</a:t>
+            </a:r>
+            <a:endParaRPr dirty="0"/>
           </a:p>
           <a:p>
             <a:pPr>
@@ -4332,8 +4925,14 @@
               </a:defRPr>
             </a:pPr>
             <a:r>
-              <a:t>• prompt injection testy</a:t>
-            </a:r>
+              <a:rPr dirty="0"/>
+              <a:t>• testy</a:t>
+            </a:r>
+            <a:r>
+              <a:rPr lang="en-US" dirty="0"/>
+              <a:t> prompt poisoning.</a:t>
+            </a:r>
+            <a:endParaRPr dirty="0"/>
           </a:p>
           <a:p>
             <a:pPr>
@@ -4348,8 +4947,46 @@
               </a:defRPr>
             </a:pPr>
             <a:r>
-              <a:t>• groundedness a eval dataset</a:t>
-            </a:r>
+              <a:rPr dirty="0"/>
+              <a:t>• </a:t>
+            </a:r>
+            <a:r>
+              <a:rPr lang="sk-SK" dirty="0" err="1"/>
+              <a:t>scoring</a:t>
+            </a:r>
+            <a:r>
+              <a:rPr lang="sk-SK" dirty="0"/>
+              <a:t>, </a:t>
+            </a:r>
+            <a:r>
+              <a:rPr dirty="0" err="1"/>
+              <a:t>groundedness</a:t>
+            </a:r>
+            <a:r>
+              <a:rPr dirty="0"/>
+              <a:t> </a:t>
+            </a:r>
+            <a:r>
+              <a:rPr lang="sk-SK" dirty="0"/>
+              <a:t>cez</a:t>
+            </a:r>
+            <a:r>
+              <a:rPr dirty="0"/>
+              <a:t> eval</a:t>
+            </a:r>
+            <a:r>
+              <a:rPr lang="sk-SK" dirty="0" err="1"/>
+              <a:t>uačný</a:t>
+            </a:r>
+            <a:r>
+              <a:rPr dirty="0"/>
+              <a:t> dataset</a:t>
+            </a:r>
+            <a:r>
+              <a:rPr lang="sk-SK" dirty="0"/>
+              <a:t> </a:t>
+            </a:r>
+            <a:endParaRPr dirty="0"/>
           </a:p>
           <a:p>
             <a:pPr>
@@ -4364,6 +5001,7 @@
               </a:defRPr>
             </a:pPr>
             <a:r>
+              <a:rPr dirty="0"/>
               <a:t>• DLP/PII leakage testy</a:t>
             </a:r>
           </a:p>
@@ -4380,7 +5018,16 @@
               </a:defRPr>
             </a:pPr>
             <a:r>
-              <a:t>• auditovateľnosť end-to-end</a:t>
+              <a:rPr dirty="0"/>
+              <a:t>• </a:t>
+            </a:r>
+            <a:r>
+              <a:rPr dirty="0" err="1"/>
+              <a:t>auditovateľnosť</a:t>
+            </a:r>
+            <a:r>
+              <a:rPr dirty="0"/>
+              <a:t> end-to-end</a:t>
             </a:r>
           </a:p>
           <a:p>
@@ -4396,7 +5043,24 @@
               </a:defRPr>
             </a:pPr>
             <a:r>
-              <a:t>• pilotné metriky a go/no-go report</a:t>
+              <a:rPr dirty="0"/>
+              <a:t>• </a:t>
+            </a:r>
+            <a:r>
+              <a:rPr dirty="0" err="1"/>
+              <a:t>pilotné</a:t>
+            </a:r>
+            <a:r>
+              <a:rPr dirty="0"/>
+              <a:t> </a:t>
+            </a:r>
+            <a:r>
+              <a:rPr dirty="0" err="1"/>
+              <a:t>metriky</a:t>
+            </a:r>
+            <a:r>
+              <a:rPr dirty="0"/>
+              <a:t> a go/no-go report</a:t>
             </a:r>
           </a:p>
         </p:txBody>
@@ -4449,8 +5113,86 @@
               </a:defRPr>
             </a:pPr>
             <a:r>
-              <a:t>Finálny záver: AI má zrýchliť a zlepšiť prácu, ale zodpovednosť, kontrola a rozhodnutie ostávajú na človeku.</a:t>
-            </a:r>
+              <a:rPr lang="sk-SK" sz="1300" b="1" dirty="0"/>
+              <a:t>Mojim c</a:t>
+            </a:r>
+            <a:r>
+              <a:rPr lang="en-US" sz="1300" b="1" dirty="0" err="1"/>
+              <a:t>ieľom</a:t>
+            </a:r>
+            <a:r>
+              <a:rPr lang="en-US" sz="1300" b="1" dirty="0"/>
+              <a:t> </a:t>
+            </a:r>
+            <a:r>
+              <a:rPr lang="sk-SK" sz="1300" b="1" dirty="0"/>
+              <a:t>je  navrhnúť  </a:t>
+            </a:r>
+            <a:r>
+              <a:rPr lang="en-US" sz="1300" b="1" dirty="0" err="1"/>
+              <a:t>bezpečný</a:t>
+            </a:r>
+            <a:r>
+              <a:rPr lang="en-US" sz="1300" b="1" dirty="0"/>
+              <a:t>, </a:t>
+            </a:r>
+            <a:r>
+              <a:rPr lang="en-US" sz="1300" b="1" dirty="0" err="1"/>
+              <a:t>auditovateľný</a:t>
+            </a:r>
+            <a:r>
+              <a:rPr lang="en-US" sz="1300" b="1" dirty="0"/>
+              <a:t> a </a:t>
+            </a:r>
+            <a:r>
+              <a:rPr lang="en-US" sz="1300" b="1" dirty="0" err="1"/>
+              <a:t>prakticky</a:t>
+            </a:r>
+            <a:r>
+              <a:rPr lang="en-US" sz="1300" b="1" dirty="0"/>
+              <a:t> </a:t>
+            </a:r>
+            <a:r>
+              <a:rPr lang="en-US" sz="1300" b="1" dirty="0" err="1"/>
+              <a:t>použiteľný</a:t>
+            </a:r>
+            <a:r>
+              <a:rPr lang="en-US" sz="1300" b="1" dirty="0"/>
+              <a:t> AI </a:t>
+            </a:r>
+            <a:r>
+              <a:rPr lang="en-US" sz="1300" b="1" dirty="0" err="1"/>
+              <a:t>systém</a:t>
+            </a:r>
+            <a:r>
+              <a:rPr lang="en-US" sz="1300" b="1" dirty="0"/>
+              <a:t>, </a:t>
+            </a:r>
+            <a:r>
+              <a:rPr lang="en-US" sz="1300" b="1" dirty="0" err="1"/>
+              <a:t>ktorému</a:t>
+            </a:r>
+            <a:r>
+              <a:rPr lang="en-US" sz="1300" b="1" dirty="0"/>
+              <a:t> </a:t>
+            </a:r>
+            <a:r>
+              <a:rPr lang="en-US" sz="1300" b="1" dirty="0" err="1"/>
+              <a:t>organizácia</a:t>
+            </a:r>
+            <a:r>
+              <a:rPr lang="en-US" sz="1300" b="1" dirty="0"/>
+              <a:t> vie </a:t>
+            </a:r>
+            <a:r>
+              <a:rPr lang="en-US" sz="1300" b="1" dirty="0" err="1"/>
+              <a:t>dôverovať</a:t>
+            </a:r>
+            <a:r>
+              <a:rPr lang="en-US" sz="1300" b="1" dirty="0"/>
+              <a:t>.</a:t>
+            </a:r>
+            <a:endParaRPr dirty="0"/>
           </a:p>
         </p:txBody>
       </p:sp>
@@ -4734,7 +5476,7 @@
         <p:spPr>
           <a:xfrm>
             <a:off x="786384" y="1527048"/>
-            <a:ext cx="3227832" cy="4178808"/>
+            <a:ext cx="3227832" cy="1582484"/>
           </a:xfrm>
           <a:prstGeom prst="rect">
             <a:avLst/>
@@ -4756,7 +5498,12 @@
               </a:defRPr>
             </a:pPr>
             <a:r>
-              <a:t>Hlavné use cases</a:t>
+              <a:rPr dirty="0" err="1"/>
+              <a:t>Hlavné</a:t>
+            </a:r>
+            <a:r>
+              <a:rPr dirty="0"/>
+              <a:t> use cases</a:t>
             </a:r>
           </a:p>
           <a:p>
@@ -4772,8 +5519,38 @@
               </a:defRPr>
             </a:pPr>
             <a:r>
-              <a:t>• vyhľadávanie smerníc, metodík a procesov</a:t>
-            </a:r>
+              <a:rPr dirty="0"/>
+              <a:t>• </a:t>
+            </a:r>
+            <a:r>
+              <a:rPr dirty="0" err="1"/>
+              <a:t>vyhľadávanie</a:t>
+            </a:r>
+            <a:r>
+              <a:rPr dirty="0"/>
+              <a:t> </a:t>
+            </a:r>
+            <a:r>
+              <a:rPr dirty="0" err="1"/>
+              <a:t>smerníc</a:t>
+            </a:r>
+            <a:r>
+              <a:rPr dirty="0"/>
+              <a:t>, </a:t>
+            </a:r>
+            <a:r>
+              <a:rPr dirty="0" err="1"/>
+              <a:t>metodík</a:t>
+            </a:r>
+            <a:r>
+              <a:rPr dirty="0"/>
+              <a:t> a </a:t>
+            </a:r>
+            <a:r>
+              <a:rPr dirty="0" err="1"/>
+              <a:t>procesov</a:t>
+            </a:r>
+            <a:endParaRPr dirty="0"/>
           </a:p>
           <a:p>
             <a:pPr>
@@ -4788,8 +5565,30 @@
               </a:defRPr>
             </a:pPr>
             <a:r>
-              <a:t>• sumarizácia interných informácií</a:t>
-            </a:r>
+              <a:rPr dirty="0"/>
+              <a:t>• </a:t>
+            </a:r>
+            <a:r>
+              <a:rPr dirty="0" err="1"/>
+              <a:t>sumarizácia</a:t>
+            </a:r>
+            <a:r>
+              <a:rPr dirty="0"/>
+              <a:t> </a:t>
+            </a:r>
+            <a:r>
+              <a:rPr dirty="0" err="1"/>
+              <a:t>interných</a:t>
+            </a:r>
+            <a:r>
+              <a:rPr dirty="0"/>
+              <a:t> </a:t>
+            </a:r>
+            <a:r>
+              <a:rPr dirty="0" err="1"/>
+              <a:t>informácií</a:t>
+            </a:r>
+            <a:endParaRPr dirty="0"/>
           </a:p>
           <a:p>
             <a:pPr>
@@ -4804,8 +5603,30 @@
               </a:defRPr>
             </a:pPr>
             <a:r>
-              <a:t>• návrhy odpovedí a podkladov</a:t>
-            </a:r>
+              <a:rPr dirty="0"/>
+              <a:t>• </a:t>
+            </a:r>
+            <a:r>
+              <a:rPr dirty="0" err="1"/>
+              <a:t>návrhy</a:t>
+            </a:r>
+            <a:r>
+              <a:rPr dirty="0"/>
+              <a:t> </a:t>
+            </a:r>
+            <a:r>
+              <a:rPr dirty="0" err="1"/>
+              <a:t>odpovedí</a:t>
+            </a:r>
+            <a:r>
+              <a:rPr dirty="0"/>
+              <a:t> a </a:t>
+            </a:r>
+            <a:r>
+              <a:rPr dirty="0" err="1"/>
+              <a:t>podkladov</a:t>
+            </a:r>
+            <a:endParaRPr dirty="0"/>
           </a:p>
           <a:p>
             <a:pPr>
@@ -4820,8 +5641,30 @@
               </a:defRPr>
             </a:pPr>
             <a:r>
-              <a:t>• analýza biznis požiadaviek</a:t>
-            </a:r>
+              <a:rPr dirty="0"/>
+              <a:t>• </a:t>
+            </a:r>
+            <a:r>
+              <a:rPr dirty="0" err="1"/>
+              <a:t>analýza</a:t>
+            </a:r>
+            <a:r>
+              <a:rPr dirty="0"/>
+              <a:t> </a:t>
+            </a:r>
+            <a:r>
+              <a:rPr dirty="0" err="1"/>
+              <a:t>biznis</a:t>
+            </a:r>
+            <a:r>
+              <a:rPr dirty="0"/>
+              <a:t> </a:t>
+            </a:r>
+            <a:r>
+              <a:rPr dirty="0" err="1"/>
+              <a:t>požiadaviek</a:t>
+            </a:r>
+            <a:endParaRPr dirty="0"/>
           </a:p>
           <a:p>
             <a:pPr>
@@ -4836,8 +5679,22 @@
               </a:defRPr>
             </a:pPr>
             <a:r>
-              <a:t>• user stories a akceptačné kritériá</a:t>
-            </a:r>
+              <a:rPr dirty="0"/>
+              <a:t>• user stories a </a:t>
+            </a:r>
+            <a:r>
+              <a:rPr dirty="0" err="1"/>
+              <a:t>akceptačné</a:t>
+            </a:r>
+            <a:r>
+              <a:rPr dirty="0"/>
+              <a:t> </a:t>
+            </a:r>
+            <a:r>
+              <a:rPr dirty="0" err="1"/>
+              <a:t>kritériá</a:t>
+            </a:r>
+            <a:endParaRPr dirty="0"/>
           </a:p>
           <a:p>
             <a:pPr>
@@ -4852,8 +5709,30 @@
               </a:defRPr>
             </a:pPr>
             <a:r>
-              <a:t>• dopady, závislosti a riziká</a:t>
-            </a:r>
+              <a:rPr dirty="0"/>
+              <a:t>• </a:t>
+            </a:r>
+            <a:r>
+              <a:rPr dirty="0" err="1"/>
+              <a:t>dopady</a:t>
+            </a:r>
+            <a:r>
+              <a:rPr dirty="0"/>
+              <a:t>, </a:t>
+            </a:r>
+            <a:r>
+              <a:rPr dirty="0" err="1"/>
+              <a:t>závislosti</a:t>
+            </a:r>
+            <a:r>
+              <a:rPr dirty="0"/>
+              <a:t> a </a:t>
+            </a:r>
+            <a:r>
+              <a:rPr dirty="0" err="1"/>
+              <a:t>riziká</a:t>
+            </a:r>
+            <a:endParaRPr lang="sk-SK" dirty="0"/>
           </a:p>
         </p:txBody>
       </p:sp>
@@ -5096,8 +5975,34 @@
               </a:defRPr>
             </a:pPr>
             <a:r>
-              <a:t>Čo riešenie nesmie robiť</a:t>
-            </a:r>
+              <a:rPr dirty="0" err="1"/>
+              <a:t>Čo</a:t>
+            </a:r>
+            <a:r>
+              <a:rPr dirty="0"/>
+              <a:t> </a:t>
+            </a:r>
+            <a:r>
+              <a:rPr dirty="0" err="1"/>
+              <a:t>riešenie</a:t>
+            </a:r>
+            <a:r>
+              <a:rPr dirty="0"/>
+              <a:t> </a:t>
+            </a:r>
+            <a:r>
+              <a:rPr dirty="0" err="1"/>
+              <a:t>nesmie</a:t>
+            </a:r>
+            <a:r>
+              <a:rPr dirty="0"/>
+              <a:t> </a:t>
+            </a:r>
+            <a:r>
+              <a:rPr dirty="0" err="1"/>
+              <a:t>robiť</a:t>
+            </a:r>
+            <a:endParaRPr dirty="0"/>
           </a:p>
           <a:p>
             <a:pPr>
@@ -5112,8 +6017,30 @@
               </a:defRPr>
             </a:pPr>
             <a:r>
-              <a:t>• automaticky rozhodovať za používateľa</a:t>
-            </a:r>
+              <a:rPr dirty="0"/>
+              <a:t>• </a:t>
+            </a:r>
+            <a:r>
+              <a:rPr dirty="0" err="1"/>
+              <a:t>automaticky</a:t>
+            </a:r>
+            <a:r>
+              <a:rPr dirty="0"/>
+              <a:t> </a:t>
+            </a:r>
+            <a:r>
+              <a:rPr dirty="0" err="1"/>
+              <a:t>rozhodovať</a:t>
+            </a:r>
+            <a:r>
+              <a:rPr dirty="0"/>
+              <a:t> za </a:t>
+            </a:r>
+            <a:r>
+              <a:rPr dirty="0" err="1"/>
+              <a:t>používateľa</a:t>
+            </a:r>
+            <a:endParaRPr dirty="0"/>
           </a:p>
           <a:p>
             <a:pPr>
@@ -5128,8 +6055,30 @@
               </a:defRPr>
             </a:pPr>
             <a:r>
-              <a:t>• obchádzať prístupové práva</a:t>
-            </a:r>
+              <a:rPr dirty="0"/>
+              <a:t>• </a:t>
+            </a:r>
+            <a:r>
+              <a:rPr dirty="0" err="1"/>
+              <a:t>obchádzať</a:t>
+            </a:r>
+            <a:r>
+              <a:rPr dirty="0"/>
+              <a:t> </a:t>
+            </a:r>
+            <a:r>
+              <a:rPr dirty="0" err="1"/>
+              <a:t>prístupové</a:t>
+            </a:r>
+            <a:r>
+              <a:rPr dirty="0"/>
+              <a:t> </a:t>
+            </a:r>
+            <a:r>
+              <a:rPr dirty="0" err="1"/>
+              <a:t>práva</a:t>
+            </a:r>
+            <a:endParaRPr dirty="0"/>
           </a:p>
           <a:p>
             <a:pPr>
@@ -5144,8 +6093,38 @@
               </a:defRPr>
             </a:pPr>
             <a:r>
-              <a:t>• meniť produkčné dáta bez schválenia</a:t>
-            </a:r>
+              <a:rPr dirty="0"/>
+              <a:t>• </a:t>
+            </a:r>
+            <a:r>
+              <a:rPr dirty="0" err="1"/>
+              <a:t>meniť</a:t>
+            </a:r>
+            <a:r>
+              <a:rPr dirty="0"/>
+              <a:t> </a:t>
+            </a:r>
+            <a:r>
+              <a:rPr dirty="0" err="1"/>
+              <a:t>produkčné</a:t>
+            </a:r>
+            <a:r>
+              <a:rPr dirty="0"/>
+              <a:t> </a:t>
+            </a:r>
+            <a:r>
+              <a:rPr dirty="0" err="1"/>
+              <a:t>dáta</a:t>
+            </a:r>
+            <a:r>
+              <a:rPr dirty="0"/>
+              <a:t> bez </a:t>
+            </a:r>
+            <a:r>
+              <a:rPr dirty="0" err="1"/>
+              <a:t>schválenia</a:t>
+            </a:r>
+            <a:endParaRPr dirty="0"/>
           </a:p>
           <a:p>
             <a:pPr>
@@ -5160,8 +6139,38 @@
               </a:defRPr>
             </a:pPr>
             <a:r>
-              <a:t>• vydávať nepodložené tvrdenia za fakty</a:t>
-            </a:r>
+              <a:rPr dirty="0"/>
+              <a:t>• </a:t>
+            </a:r>
+            <a:r>
+              <a:rPr dirty="0" err="1"/>
+              <a:t>vydávať</a:t>
+            </a:r>
+            <a:r>
+              <a:rPr dirty="0"/>
+              <a:t> </a:t>
+            </a:r>
+            <a:r>
+              <a:rPr dirty="0" err="1"/>
+              <a:t>nepodložené</a:t>
+            </a:r>
+            <a:r>
+              <a:rPr dirty="0"/>
+              <a:t> </a:t>
+            </a:r>
+            <a:r>
+              <a:rPr dirty="0" err="1"/>
+              <a:t>tvrdenia</a:t>
+            </a:r>
+            <a:r>
+              <a:rPr dirty="0"/>
+              <a:t> za </a:t>
+            </a:r>
+            <a:r>
+              <a:rPr dirty="0" err="1"/>
+              <a:t>fakty</a:t>
+            </a:r>
+            <a:endParaRPr dirty="0"/>
           </a:p>
           <a:p>
             <a:pPr>
@@ -5176,8 +6185,54 @@
               </a:defRPr>
             </a:pPr>
             <a:r>
-              <a:t>• spracovať citlivé dáta mimo schválenej politiky</a:t>
-            </a:r>
+              <a:rPr dirty="0"/>
+              <a:t>• </a:t>
+            </a:r>
+            <a:r>
+              <a:rPr dirty="0" err="1"/>
+              <a:t>spracovať</a:t>
+            </a:r>
+            <a:r>
+              <a:rPr dirty="0"/>
+              <a:t> </a:t>
+            </a:r>
+            <a:r>
+              <a:rPr dirty="0" err="1"/>
+              <a:t>citlivé</a:t>
+            </a:r>
+            <a:r>
+              <a:rPr dirty="0"/>
+              <a:t> </a:t>
+            </a:r>
+            <a:r>
+              <a:rPr dirty="0" err="1"/>
+              <a:t>dáta</a:t>
+            </a:r>
+            <a:r>
+              <a:rPr dirty="0"/>
+              <a:t> </a:t>
+            </a:r>
+            <a:r>
+              <a:rPr dirty="0" err="1"/>
+              <a:t>mimo</a:t>
+            </a:r>
+            <a:r>
+              <a:rPr dirty="0"/>
+              <a:t> </a:t>
+            </a:r>
+            <a:r>
+              <a:rPr dirty="0" err="1"/>
+              <a:t>schválenej</a:t>
+            </a:r>
+            <a:r>
+              <a:rPr dirty="0"/>
+              <a:t> </a:t>
+            </a:r>
+            <a:r>
+              <a:rPr dirty="0" err="1"/>
+              <a:t>politiky</a:t>
+            </a:r>
+            <a:endParaRPr dirty="0"/>
           </a:p>
         </p:txBody>
       </p:sp>
@@ -5357,7 +6412,7 @@
         <p:spPr>
           <a:xfrm>
             <a:off x="530352" y="768096"/>
-            <a:ext cx="10972800" cy="320040"/>
+            <a:ext cx="4581703" cy="284693"/>
           </a:xfrm>
           <a:prstGeom prst="rect">
             <a:avLst/>
@@ -5379,7 +6434,36 @@
               </a:defRPr>
             </a:pPr>
             <a:r>
-              <a:t>Architektúra je vrstvená: security a governance sú mimo LLM, nie iba v prompte.</a:t>
+              <a:rPr dirty="0" err="1"/>
+              <a:t>Architektúra</a:t>
+            </a:r>
+            <a:r>
+              <a:rPr dirty="0"/>
+              <a:t> je </a:t>
+            </a:r>
+            <a:r>
+              <a:rPr dirty="0" err="1"/>
+              <a:t>vrstvená</a:t>
+            </a:r>
+            <a:r>
+              <a:rPr dirty="0"/>
+              <a:t>: security a governance </a:t>
+            </a:r>
+            <a:r>
+              <a:rPr dirty="0" err="1"/>
+              <a:t>sú</a:t>
+            </a:r>
+            <a:r>
+              <a:rPr dirty="0"/>
+              <a:t> </a:t>
+            </a:r>
+            <a:r>
+              <a:rPr dirty="0" err="1"/>
+              <a:t>mimo</a:t>
+            </a:r>
+            <a:r>
+              <a:rPr dirty="0"/>
+              <a:t> LLM.</a:t>
             </a:r>
           </a:p>
         </p:txBody>
@@ -5998,6 +7082,7 @@
               </a:defRPr>
             </a:pPr>
             <a:r>
+              <a:rPr dirty="0"/>
               <a:t>Security</a:t>
             </a:r>
           </a:p>
@@ -6014,6 +7099,7 @@
               </a:defRPr>
             </a:pPr>
             <a:r>
+              <a:rPr dirty="0"/>
               <a:t>• Entra ID</a:t>
             </a:r>
           </a:p>
@@ -6030,6 +7116,7 @@
               </a:defRPr>
             </a:pPr>
             <a:r>
+              <a:rPr dirty="0"/>
               <a:t>• RBAC / ABAC</a:t>
             </a:r>
           </a:p>
@@ -6046,6 +7133,7 @@
               </a:defRPr>
             </a:pPr>
             <a:r>
+              <a:rPr dirty="0"/>
               <a:t>• Access packages</a:t>
             </a:r>
           </a:p>
@@ -6128,6 +7216,7 @@
               </a:defRPr>
             </a:pPr>
             <a:r>
+              <a:rPr dirty="0"/>
               <a:t>Policy Enforcement</a:t>
             </a:r>
           </a:p>
@@ -6144,6 +7233,7 @@
               </a:defRPr>
             </a:pPr>
             <a:r>
+              <a:rPr dirty="0"/>
               <a:t>• claims</a:t>
             </a:r>
           </a:p>
@@ -6160,6 +7250,7 @@
               </a:defRPr>
             </a:pPr>
             <a:r>
+              <a:rPr dirty="0"/>
               <a:t>• data classification</a:t>
             </a:r>
           </a:p>
@@ -6176,6 +7267,7 @@
               </a:defRPr>
             </a:pPr>
             <a:r>
+              <a:rPr dirty="0"/>
               <a:t>• tool permissions</a:t>
             </a:r>
           </a:p>
@@ -6622,59 +7714,6 @@
             </a:pPr>
             <a:r>
               <a:t>AI Governance &amp; Quality Layer: Input/Context Verifier  →  Output Verifier  →  Scoring Agent  →  Human-in-the-loop  →  Audit</a:t>
-            </a:r>
-          </a:p>
-        </p:txBody>
-      </p:sp>
-      <p:sp>
-        <p:nvSpPr>
-          <p:cNvPr id="27" name="Rounded Rectangle 26"/>
-          <p:cNvSpPr/>
-          <p:nvPr/>
-        </p:nvSpPr>
-        <p:spPr>
-          <a:xfrm>
-            <a:off x="1051560" y="5413248"/>
-            <a:ext cx="10012680" cy="475488"/>
-          </a:xfrm>
-          <a:prstGeom prst="roundRect">
-            <a:avLst/>
-          </a:prstGeom>
-          <a:solidFill>
-            <a:srgbClr val="DC2626"/>
-          </a:solidFill>
-          <a:ln>
-            <a:noFill/>
-          </a:ln>
-        </p:spPr>
-        <p:style>
-          <a:lnRef idx="1">
-            <a:schemeClr val="accent1"/>
-          </a:lnRef>
-          <a:fillRef idx="3">
-            <a:schemeClr val="accent1"/>
-          </a:fillRef>
-          <a:effectRef idx="2">
-            <a:schemeClr val="accent1"/>
-          </a:effectRef>
-          <a:fontRef idx="minor">
-            <a:schemeClr val="lt1"/>
-          </a:fontRef>
-        </p:style>
-        <p:txBody>
-          <a:bodyPr wrap="square" rtlCol="0" anchor="ctr"/>
-          <a:lstStyle/>
-          <a:p>
-            <a:pPr algn="ctr">
-              <a:defRPr sz="1300" b="1">
-                <a:solidFill>
-                  <a:srgbClr val="FFFFFF"/>
-                </a:solidFill>
-                <a:latin typeface="Arial"/>
-              </a:defRPr>
-            </a:pPr>
-            <a:r>
-              <a:t>LLM nesmie rozhodovať o oprávneniach. Oprávnenia sa vynucujú deterministicky mimo modelu.</a:t>
             </a:r>
           </a:p>
         </p:txBody>
@@ -6830,146 +7869,13 @@
       </p:grpSpPr>
       <p:sp>
         <p:nvSpPr>
-          <p:cNvPr id="2" name="TextBox 1"/>
-          <p:cNvSpPr txBox="1"/>
-          <p:nvPr/>
-        </p:nvSpPr>
-        <p:spPr>
-          <a:xfrm>
-            <a:off x="502920" y="256032"/>
-            <a:ext cx="11201400" cy="502920"/>
-          </a:xfrm>
-          <a:prstGeom prst="rect">
-            <a:avLst/>
-          </a:prstGeom>
-          <a:noFill/>
-        </p:spPr>
-        <p:txBody>
-          <a:bodyPr wrap="none">
-            <a:spAutoFit/>
-          </a:bodyPr>
-          <a:lstStyle/>
-          <a:p>
-            <a:pPr>
-              <a:defRPr sz="2600" b="1">
-                <a:solidFill>
-                  <a:srgbClr val="143053"/>
-                </a:solidFill>
-                <a:latin typeface="Arial"/>
-              </a:defRPr>
-            </a:pPr>
-            <a:r>
-              <a:t>3. Runtime flow – ako vzniká odpoveď</a:t>
-            </a:r>
-          </a:p>
-        </p:txBody>
-      </p:sp>
-      <p:sp>
-        <p:nvSpPr>
-          <p:cNvPr id="3" name="Rectangle 2"/>
+          <p:cNvPr id="9" name="Rounded Rectangle 8"/>
           <p:cNvSpPr/>
           <p:nvPr/>
         </p:nvSpPr>
         <p:spPr>
           <a:xfrm>
-            <a:off x="502920" y="1060704"/>
-            <a:ext cx="11155680" cy="18288"/>
-          </a:xfrm>
-          <a:prstGeom prst="rect">
-            <a:avLst/>
-          </a:prstGeom>
-          <a:solidFill>
-            <a:srgbClr val="DBEAFE"/>
-          </a:solidFill>
-          <a:ln>
-            <a:noFill/>
-          </a:ln>
-        </p:spPr>
-        <p:style>
-          <a:lnRef idx="1">
-            <a:schemeClr val="accent1"/>
-          </a:lnRef>
-          <a:fillRef idx="3">
-            <a:schemeClr val="accent1"/>
-          </a:fillRef>
-          <a:effectRef idx="2">
-            <a:schemeClr val="accent1"/>
-          </a:effectRef>
-          <a:fontRef idx="minor">
-            <a:schemeClr val="lt1"/>
-          </a:fontRef>
-        </p:style>
-        <p:txBody>
-          <a:bodyPr rtlCol="0" anchor="ctr"/>
-          <a:lstStyle/>
-          <a:p>
-            <a:pPr algn="ctr"/>
-            <a:endParaRPr/>
-          </a:p>
-        </p:txBody>
-      </p:sp>
-      <p:sp>
-        <p:nvSpPr>
-          <p:cNvPr id="4" name="Rounded Rectangle 3"/>
-          <p:cNvSpPr/>
-          <p:nvPr/>
-        </p:nvSpPr>
-        <p:spPr>
-          <a:xfrm>
-            <a:off x="685800" y="1417320"/>
-            <a:ext cx="411480" cy="411480"/>
-          </a:xfrm>
-          <a:prstGeom prst="roundRect">
-            <a:avLst/>
-          </a:prstGeom>
-          <a:solidFill>
-            <a:srgbClr val="2563EB"/>
-          </a:solidFill>
-          <a:ln>
-            <a:noFill/>
-          </a:ln>
-        </p:spPr>
-        <p:style>
-          <a:lnRef idx="1">
-            <a:schemeClr val="accent1"/>
-          </a:lnRef>
-          <a:fillRef idx="3">
-            <a:schemeClr val="accent1"/>
-          </a:fillRef>
-          <a:effectRef idx="2">
-            <a:schemeClr val="accent1"/>
-          </a:effectRef>
-          <a:fontRef idx="minor">
-            <a:schemeClr val="lt1"/>
-          </a:fontRef>
-        </p:style>
-        <p:txBody>
-          <a:bodyPr wrap="square" rtlCol="0" anchor="ctr"/>
-          <a:lstStyle/>
-          <a:p>
-            <a:pPr algn="ctr">
-              <a:defRPr sz="1200" b="1">
-                <a:solidFill>
-                  <a:srgbClr val="FFFFFF"/>
-                </a:solidFill>
-                <a:latin typeface="Arial"/>
-              </a:defRPr>
-            </a:pPr>
-            <a:r>
-              <a:t>1</a:t>
-            </a:r>
-          </a:p>
-        </p:txBody>
-      </p:sp>
-      <p:sp>
-        <p:nvSpPr>
-          <p:cNvPr id="5" name="Rounded Rectangle 4"/>
-          <p:cNvSpPr/>
-          <p:nvPr/>
-        </p:nvSpPr>
-        <p:spPr>
-          <a:xfrm>
-            <a:off x="1161288" y="1344168"/>
+            <a:off x="3995928" y="1344168"/>
             <a:ext cx="2148840" cy="868680"/>
           </a:xfrm>
           <a:prstGeom prst="roundRect">
@@ -7009,14 +7915,14 @@
       </p:sp>
       <p:sp>
         <p:nvSpPr>
-          <p:cNvPr id="6" name="TextBox 5"/>
+          <p:cNvPr id="2" name="TextBox 1"/>
           <p:cNvSpPr txBox="1"/>
           <p:nvPr/>
         </p:nvSpPr>
         <p:spPr>
           <a:xfrm>
-            <a:off x="1307592" y="1453895"/>
-            <a:ext cx="1856232" cy="704088"/>
+            <a:off x="502920" y="256032"/>
+            <a:ext cx="11201400" cy="502920"/>
           </a:xfrm>
           <a:prstGeom prst="rect">
             <a:avLst/>
@@ -7024,69 +7930,78 @@
           <a:noFill/>
         </p:spPr>
         <p:txBody>
-          <a:bodyPr wrap="square" lIns="18288" rIns="18288">
+          <a:bodyPr wrap="none">
             <a:spAutoFit/>
           </a:bodyPr>
           <a:lstStyle/>
           <a:p>
             <a:pPr>
-              <a:defRPr sz="1350" b="1">
-                <a:solidFill>
-                  <a:srgbClr val="0F172A"/>
-                </a:solidFill>
-                <a:latin typeface="Arial"/>
-              </a:defRPr>
-            </a:pPr>
-            <a:r>
-              <a:t>Otázka používateľa</a:t>
-            </a:r>
-          </a:p>
-        </p:txBody>
-      </p:sp>
-      <p:cxnSp>
-        <p:nvCxnSpPr>
-          <p:cNvPr id="7" name="Connector 6"/>
-          <p:cNvCxnSpPr/>
-          <p:nvPr/>
-        </p:nvCxnSpPr>
-        <p:spPr>
-          <a:xfrm>
-            <a:off x="3337560" y="1572768"/>
-            <a:ext cx="201168" cy="0"/>
-          </a:xfrm>
-          <a:prstGeom prst="line">
-            <a:avLst/>
-          </a:prstGeom>
-          <a:ln w="15240">
-            <a:solidFill>
-              <a:srgbClr val="475569"/>
-            </a:solidFill>
+              <a:defRPr sz="2600" b="1">
+                <a:solidFill>
+                  <a:srgbClr val="143053"/>
+                </a:solidFill>
+                <a:latin typeface="Arial"/>
+              </a:defRPr>
+            </a:pPr>
+            <a:r>
+              <a:t>3. Runtime flow – ako vzniká odpoveď</a:t>
+            </a:r>
+          </a:p>
+        </p:txBody>
+      </p:sp>
+      <p:sp>
+        <p:nvSpPr>
+          <p:cNvPr id="3" name="Rectangle 2"/>
+          <p:cNvSpPr/>
+          <p:nvPr/>
+        </p:nvSpPr>
+        <p:spPr>
+          <a:xfrm>
+            <a:off x="502920" y="1060704"/>
+            <a:ext cx="11155680" cy="18288"/>
+          </a:xfrm>
+          <a:prstGeom prst="rect">
+            <a:avLst/>
+          </a:prstGeom>
+          <a:solidFill>
+            <a:srgbClr val="DBEAFE"/>
+          </a:solidFill>
+          <a:ln>
+            <a:noFill/>
           </a:ln>
         </p:spPr>
         <p:style>
-          <a:lnRef idx="2">
+          <a:lnRef idx="1">
             <a:schemeClr val="accent1"/>
           </a:lnRef>
-          <a:fillRef idx="0">
+          <a:fillRef idx="3">
             <a:schemeClr val="accent1"/>
           </a:fillRef>
-          <a:effectRef idx="1">
+          <a:effectRef idx="2">
             <a:schemeClr val="accent1"/>
           </a:effectRef>
           <a:fontRef idx="minor">
-            <a:schemeClr val="tx1"/>
+            <a:schemeClr val="lt1"/>
           </a:fontRef>
         </p:style>
-      </p:cxnSp>
-      <p:sp>
-        <p:nvSpPr>
-          <p:cNvPr id="8" name="Rounded Rectangle 7"/>
+        <p:txBody>
+          <a:bodyPr rtlCol="0" anchor="ctr"/>
+          <a:lstStyle/>
+          <a:p>
+            <a:pPr algn="ctr"/>
+            <a:endParaRPr/>
+          </a:p>
+        </p:txBody>
+      </p:sp>
+      <p:sp>
+        <p:nvSpPr>
+          <p:cNvPr id="4" name="Rounded Rectangle 3"/>
           <p:cNvSpPr/>
           <p:nvPr/>
         </p:nvSpPr>
         <p:spPr>
           <a:xfrm>
-            <a:off x="3520440" y="1417320"/>
+            <a:off x="685800" y="1417320"/>
             <a:ext cx="411480" cy="411480"/>
           </a:xfrm>
           <a:prstGeom prst="roundRect">
@@ -7126,20 +8041,20 @@
               </a:defRPr>
             </a:pPr>
             <a:r>
-              <a:t>2</a:t>
-            </a:r>
-          </a:p>
-        </p:txBody>
-      </p:sp>
-      <p:sp>
-        <p:nvSpPr>
-          <p:cNvPr id="9" name="Rounded Rectangle 8"/>
+              <a:t>1</a:t>
+            </a:r>
+          </a:p>
+        </p:txBody>
+      </p:sp>
+      <p:sp>
+        <p:nvSpPr>
+          <p:cNvPr id="5" name="Rounded Rectangle 4"/>
           <p:cNvSpPr/>
           <p:nvPr/>
         </p:nvSpPr>
         <p:spPr>
           <a:xfrm>
-            <a:off x="3995928" y="1344168"/>
+            <a:off x="1161288" y="1344168"/>
             <a:ext cx="2148840" cy="868680"/>
           </a:xfrm>
           <a:prstGeom prst="roundRect">
@@ -7179,13 +8094,13 @@
       </p:sp>
       <p:sp>
         <p:nvSpPr>
-          <p:cNvPr id="10" name="TextBox 9"/>
+          <p:cNvPr id="6" name="TextBox 5"/>
           <p:cNvSpPr txBox="1"/>
           <p:nvPr/>
         </p:nvSpPr>
         <p:spPr>
           <a:xfrm>
-            <a:off x="4142232" y="1453895"/>
+            <a:off x="4279392" y="1591054"/>
             <a:ext cx="1856232" cy="704088"/>
           </a:xfrm>
           <a:prstGeom prst="rect">
@@ -7208,7 +8123,154 @@
               </a:defRPr>
             </a:pPr>
             <a:r>
-              <a:t>AuthN/AuthZ + policy check</a:t>
+              <a:rPr dirty="0" err="1"/>
+              <a:t>Otázka</a:t>
+            </a:r>
+            <a:r>
+              <a:rPr dirty="0"/>
+              <a:t> </a:t>
+            </a:r>
+            <a:r>
+              <a:rPr dirty="0" err="1"/>
+              <a:t>používateľa</a:t>
+            </a:r>
+            <a:endParaRPr dirty="0"/>
+          </a:p>
+        </p:txBody>
+      </p:sp>
+      <p:cxnSp>
+        <p:nvCxnSpPr>
+          <p:cNvPr id="7" name="Connector 6"/>
+          <p:cNvCxnSpPr/>
+          <p:nvPr/>
+        </p:nvCxnSpPr>
+        <p:spPr>
+          <a:xfrm>
+            <a:off x="3337560" y="1572768"/>
+            <a:ext cx="201168" cy="0"/>
+          </a:xfrm>
+          <a:prstGeom prst="line">
+            <a:avLst/>
+          </a:prstGeom>
+          <a:ln w="15240">
+            <a:solidFill>
+              <a:srgbClr val="475569"/>
+            </a:solidFill>
+          </a:ln>
+        </p:spPr>
+        <p:style>
+          <a:lnRef idx="2">
+            <a:schemeClr val="accent1"/>
+          </a:lnRef>
+          <a:fillRef idx="0">
+            <a:schemeClr val="accent1"/>
+          </a:fillRef>
+          <a:effectRef idx="1">
+            <a:schemeClr val="accent1"/>
+          </a:effectRef>
+          <a:fontRef idx="minor">
+            <a:schemeClr val="tx1"/>
+          </a:fontRef>
+        </p:style>
+      </p:cxnSp>
+      <p:sp>
+        <p:nvSpPr>
+          <p:cNvPr id="8" name="Rounded Rectangle 7"/>
+          <p:cNvSpPr/>
+          <p:nvPr/>
+        </p:nvSpPr>
+        <p:spPr>
+          <a:xfrm>
+            <a:off x="3520440" y="1417320"/>
+            <a:ext cx="411480" cy="411480"/>
+          </a:xfrm>
+          <a:prstGeom prst="roundRect">
+            <a:avLst/>
+          </a:prstGeom>
+          <a:solidFill>
+            <a:srgbClr val="2563EB"/>
+          </a:solidFill>
+          <a:ln>
+            <a:noFill/>
+          </a:ln>
+        </p:spPr>
+        <p:style>
+          <a:lnRef idx="1">
+            <a:schemeClr val="accent1"/>
+          </a:lnRef>
+          <a:fillRef idx="3">
+            <a:schemeClr val="accent1"/>
+          </a:fillRef>
+          <a:effectRef idx="2">
+            <a:schemeClr val="accent1"/>
+          </a:effectRef>
+          <a:fontRef idx="minor">
+            <a:schemeClr val="lt1"/>
+          </a:fontRef>
+        </p:style>
+        <p:txBody>
+          <a:bodyPr wrap="square" rtlCol="0" anchor="ctr"/>
+          <a:lstStyle/>
+          <a:p>
+            <a:pPr algn="ctr">
+              <a:defRPr sz="1200" b="1">
+                <a:solidFill>
+                  <a:srgbClr val="FFFFFF"/>
+                </a:solidFill>
+                <a:latin typeface="Arial"/>
+              </a:defRPr>
+            </a:pPr>
+            <a:r>
+              <a:t>2</a:t>
+            </a:r>
+          </a:p>
+        </p:txBody>
+      </p:sp>
+      <p:sp>
+        <p:nvSpPr>
+          <p:cNvPr id="10" name="TextBox 9"/>
+          <p:cNvSpPr txBox="1"/>
+          <p:nvPr/>
+        </p:nvSpPr>
+        <p:spPr>
+          <a:xfrm>
+            <a:off x="1307592" y="1485897"/>
+            <a:ext cx="1856232" cy="704088"/>
+          </a:xfrm>
+          <a:prstGeom prst="rect">
+            <a:avLst/>
+          </a:prstGeom>
+          <a:noFill/>
+        </p:spPr>
+        <p:txBody>
+          <a:bodyPr wrap="square" lIns="18288" rIns="18288">
+            <a:spAutoFit/>
+          </a:bodyPr>
+          <a:lstStyle/>
+          <a:p>
+            <a:pPr>
+              <a:defRPr sz="1350" b="1">
+                <a:solidFill>
+                  <a:srgbClr val="0F172A"/>
+                </a:solidFill>
+                <a:latin typeface="Arial"/>
+              </a:defRPr>
+            </a:pPr>
+            <a:r>
+              <a:rPr dirty="0" err="1"/>
+              <a:t>AuthN</a:t>
+            </a:r>
+            <a:r>
+              <a:rPr dirty="0"/>
+              <a:t>/</a:t>
+            </a:r>
+            <a:r>
+              <a:rPr dirty="0" err="1"/>
+              <a:t>AuthZ</a:t>
+            </a:r>
+            <a:r>
+              <a:rPr dirty="0"/>
+              <a:t> + policy check</a:t>
             </a:r>
           </a:p>
         </p:txBody>
@@ -7683,8 +8745,14 @@
               </a:defRPr>
             </a:pPr>
             <a:r>
-              <a:t>Model routing + odpoveď</a:t>
-            </a:r>
+              <a:rPr dirty="0"/>
+              <a:t>Model routing + </a:t>
+            </a:r>
+            <a:r>
+              <a:rPr dirty="0" err="1"/>
+              <a:t>odpoveď</a:t>
+            </a:r>
+            <a:endParaRPr dirty="0"/>
           </a:p>
         </p:txBody>
       </p:sp>
@@ -8594,7 +9662,7 @@
         <p:spPr>
           <a:xfrm>
             <a:off x="502920" y="256032"/>
-            <a:ext cx="11201400" cy="502920"/>
+            <a:ext cx="9552615" cy="492443"/>
           </a:xfrm>
           <a:prstGeom prst="rect">
             <a:avLst/>
@@ -8616,8 +9684,26 @@
               </a:defRPr>
             </a:pPr>
             <a:r>
-              <a:t>4. Permission-aware RAG a práca s dokumentmi</a:t>
-            </a:r>
+              <a:rPr dirty="0"/>
+              <a:t>4. </a:t>
+            </a:r>
+            <a:r>
+              <a:rPr lang="en-US" dirty="0"/>
+              <a:t>Document processor flow – pr</a:t>
+            </a:r>
+            <a:r>
+              <a:rPr lang="sk-SK" dirty="0" err="1"/>
+              <a:t>íprava</a:t>
+            </a:r>
+            <a:r>
+              <a:rPr lang="sk-SK" dirty="0"/>
+              <a:t> pre bezpečné </a:t>
+            </a:r>
+            <a:r>
+              <a:rPr lang="sk-SK" dirty="0" err="1"/>
+              <a:t>query</a:t>
+            </a:r>
+            <a:endParaRPr dirty="0"/>
           </a:p>
         </p:txBody>
       </p:sp>
@@ -8720,7 +9806,7 @@
         <p:spPr>
           <a:xfrm>
             <a:off x="832104" y="1481328"/>
-            <a:ext cx="2816352" cy="4361688"/>
+            <a:ext cx="2816352" cy="2185214"/>
           </a:xfrm>
           <a:prstGeom prst="rect">
             <a:avLst/>
@@ -8742,6 +9828,7 @@
               </a:defRPr>
             </a:pPr>
             <a:r>
+              <a:rPr dirty="0"/>
               <a:t>Document processing</a:t>
             </a:r>
           </a:p>
@@ -8758,7 +9845,24 @@
               </a:defRPr>
             </a:pPr>
             <a:r>
-              <a:t>• ingest zo SharePointu, portálov a DB</a:t>
+              <a:rPr dirty="0"/>
+              <a:t>• ingest zo </a:t>
+            </a:r>
+            <a:r>
+              <a:rPr dirty="0" err="1"/>
+              <a:t>SharePointu</a:t>
+            </a:r>
+            <a:r>
+              <a:rPr dirty="0"/>
+              <a:t>, </a:t>
+            </a:r>
+            <a:r>
+              <a:rPr dirty="0" err="1"/>
+              <a:t>portálov</a:t>
+            </a:r>
+            <a:r>
+              <a:rPr dirty="0"/>
+              <a:t> a DB</a:t>
             </a:r>
           </a:p>
           <a:p>
@@ -8774,6 +9878,7 @@
               </a:defRPr>
             </a:pPr>
             <a:r>
+              <a:rPr dirty="0"/>
               <a:t>• chunking + embeddings</a:t>
             </a:r>
           </a:p>
@@ -8790,8 +9895,38 @@
               </a:defRPr>
             </a:pPr>
             <a:r>
-              <a:t>• verzia, vlastník, zdroj, validita</a:t>
-            </a:r>
+              <a:rPr dirty="0"/>
+              <a:t>• </a:t>
+            </a:r>
+            <a:r>
+              <a:rPr dirty="0" err="1"/>
+              <a:t>verzia</a:t>
+            </a:r>
+            <a:r>
+              <a:rPr dirty="0"/>
+              <a:t>, </a:t>
+            </a:r>
+            <a:r>
+              <a:rPr dirty="0" err="1"/>
+              <a:t>vlastník</a:t>
+            </a:r>
+            <a:r>
+              <a:rPr dirty="0"/>
+              <a:t>, </a:t>
+            </a:r>
+            <a:r>
+              <a:rPr dirty="0" err="1"/>
+              <a:t>zdroj</a:t>
+            </a:r>
+            <a:r>
+              <a:rPr dirty="0"/>
+              <a:t>, </a:t>
+            </a:r>
+            <a:r>
+              <a:rPr dirty="0" err="1"/>
+              <a:t>validita</a:t>
+            </a:r>
+            <a:endParaRPr dirty="0"/>
           </a:p>
           <a:p>
             <a:pPr>
@@ -8806,8 +9941,122 @@
               </a:defRPr>
             </a:pPr>
             <a:r>
+              <a:rPr dirty="0"/>
               <a:t>• data classification a retention</a:t>
             </a:r>
+            <a:endParaRPr lang="en-US" dirty="0"/>
+          </a:p>
+          <a:p>
+            <a:pPr>
+              <a:spcAft>
+                <a:spcPts val="200"/>
+              </a:spcAft>
+              <a:defRPr sz="1250">
+                <a:solidFill>
+                  <a:srgbClr val="0F172A"/>
+                </a:solidFill>
+                <a:latin typeface="Arial"/>
+              </a:defRPr>
+            </a:pPr>
+            <a:r>
+              <a:rPr lang="en-US" dirty="0"/>
+              <a:t>• metadata </a:t>
+            </a:r>
+            <a:r>
+              <a:rPr lang="en-US" dirty="0" err="1"/>
+              <a:t>manualne</a:t>
+            </a:r>
+            <a:r>
+              <a:rPr lang="en-US" dirty="0"/>
+              <a:t> </a:t>
+            </a:r>
+            <a:r>
+              <a:rPr lang="en-US" dirty="0" err="1"/>
+              <a:t>alebo</a:t>
+            </a:r>
+            <a:r>
+              <a:rPr lang="en-US" dirty="0"/>
+              <a:t> </a:t>
+            </a:r>
+            <a:r>
+              <a:rPr lang="en-US" dirty="0" err="1"/>
+              <a:t>automaticky</a:t>
+            </a:r>
+            <a:r>
+              <a:rPr lang="en-US" dirty="0"/>
+              <a:t> ( </a:t>
+            </a:r>
+            <a:r>
+              <a:rPr lang="en-US" dirty="0" err="1"/>
+              <a:t>priklad</a:t>
+            </a:r>
+            <a:r>
+              <a:rPr lang="en-US" dirty="0"/>
+              <a:t>: MS Purview)</a:t>
+            </a:r>
+          </a:p>
+          <a:p>
+            <a:pPr>
+              <a:spcAft>
+                <a:spcPts val="200"/>
+              </a:spcAft>
+              <a:defRPr sz="1250">
+                <a:solidFill>
+                  <a:srgbClr val="0F172A"/>
+                </a:solidFill>
+                <a:latin typeface="Arial"/>
+              </a:defRPr>
+            </a:pPr>
+            <a:r>
+              <a:rPr lang="en-US" dirty="0"/>
+              <a:t>• </a:t>
+            </a:r>
+            <a:r>
+              <a:rPr lang="en-US" dirty="0" err="1"/>
+              <a:t>notifikacia</a:t>
+            </a:r>
+            <a:r>
+              <a:rPr lang="en-US" dirty="0"/>
+              <a:t> a reindexing </a:t>
+            </a:r>
+            <a:r>
+              <a:rPr lang="en-US" dirty="0" err="1"/>
+              <a:t>pri</a:t>
+            </a:r>
+            <a:r>
+              <a:rPr lang="en-US" dirty="0"/>
+              <a:t> </a:t>
+            </a:r>
+            <a:r>
+              <a:rPr lang="en-US" dirty="0" err="1"/>
+              <a:t>zmene</a:t>
+            </a:r>
+            <a:r>
+              <a:rPr lang="en-US" dirty="0"/>
+              <a:t> </a:t>
+            </a:r>
+            <a:r>
+              <a:rPr lang="en-US" dirty="0" err="1"/>
+              <a:t>dokumentov</a:t>
+            </a:r>
+            <a:r>
+              <a:rPr lang="en-US" dirty="0"/>
+              <a:t>/metadata</a:t>
+            </a:r>
+          </a:p>
+          <a:p>
+            <a:pPr>
+              <a:spcAft>
+                <a:spcPts val="200"/>
+              </a:spcAft>
+              <a:defRPr sz="1250">
+                <a:solidFill>
+                  <a:srgbClr val="0F172A"/>
+                </a:solidFill>
+                <a:latin typeface="Arial"/>
+              </a:defRPr>
+            </a:pPr>
+            <a:endParaRPr dirty="0"/>
           </a:p>
         </p:txBody>
       </p:sp>
@@ -8866,7 +10115,7 @@
         <p:spPr>
           <a:xfrm>
             <a:off x="4306824" y="1481328"/>
-            <a:ext cx="3273552" cy="4361688"/>
+            <a:ext cx="3273552" cy="2018501"/>
           </a:xfrm>
           <a:prstGeom prst="rect">
             <a:avLst/>
@@ -8888,8 +10137,22 @@
               </a:defRPr>
             </a:pPr>
             <a:r>
-              <a:t>ACL metadata na chunku</a:t>
-            </a:r>
+              <a:rPr dirty="0"/>
+              <a:t>ACL metadata </a:t>
+            </a:r>
+            <a:r>
+              <a:rPr dirty="0" err="1"/>
+              <a:t>na</a:t>
+            </a:r>
+            <a:r>
+              <a:rPr dirty="0"/>
+              <a:t> </a:t>
+            </a:r>
+            <a:r>
+              <a:rPr dirty="0" err="1"/>
+              <a:t>chunku</a:t>
+            </a:r>
+            <a:endParaRPr dirty="0"/>
           </a:p>
           <a:p>
             <a:pPr>
@@ -8904,8 +10167,30 @@
               </a:defRPr>
             </a:pPr>
             <a:r>
-              <a:t>• document_id, source_system, source_url</a:t>
-            </a:r>
+              <a:rPr dirty="0"/>
+              <a:t>• </a:t>
+            </a:r>
+            <a:r>
+              <a:rPr dirty="0" err="1"/>
+              <a:t>document_id</a:t>
+            </a:r>
+            <a:r>
+              <a:rPr dirty="0"/>
+              <a:t>, </a:t>
+            </a:r>
+            <a:r>
+              <a:rPr dirty="0" err="1"/>
+              <a:t>source_system</a:t>
+            </a:r>
+            <a:r>
+              <a:rPr dirty="0"/>
+              <a:t>, </a:t>
+            </a:r>
+            <a:r>
+              <a:rPr dirty="0" err="1"/>
+              <a:t>source_url</a:t>
+            </a:r>
+            <a:endParaRPr dirty="0"/>
           </a:p>
           <a:p>
             <a:pPr>
@@ -8920,8 +10205,22 @@
               </a:defRPr>
             </a:pPr>
             <a:r>
-              <a:t>• acl_groups / acl_users</a:t>
-            </a:r>
+              <a:rPr dirty="0"/>
+              <a:t>• </a:t>
+            </a:r>
+            <a:r>
+              <a:rPr dirty="0" err="1"/>
+              <a:t>acl_groups</a:t>
+            </a:r>
+            <a:r>
+              <a:rPr dirty="0"/>
+              <a:t> / </a:t>
+            </a:r>
+            <a:r>
+              <a:rPr dirty="0" err="1"/>
+              <a:t>acl_users</a:t>
+            </a:r>
+            <a:endParaRPr dirty="0"/>
           </a:p>
           <a:p>
             <a:pPr>
@@ -8936,7 +10235,20 @@
               </a:defRPr>
             </a:pPr>
             <a:r>
-              <a:t>• classification, owner, department</a:t>
+              <a:rPr dirty="0"/>
+              <a:t>• classification</a:t>
+            </a:r>
+            <a:r>
+              <a:rPr lang="en-US" dirty="0"/>
+              <a:t> ( </a:t>
+            </a:r>
+            <a:r>
+              <a:rPr lang="en-US" dirty="0" err="1"/>
+              <a:t>financne</a:t>
+            </a:r>
+            <a:r>
+              <a:rPr lang="en-US" dirty="0"/>
+              <a:t>)</a:t>
             </a:r>
           </a:p>
           <a:p>
@@ -8952,7 +10264,16 @@
               </a:defRPr>
             </a:pPr>
             <a:r>
-              <a:t>• valid_from / valid_to</a:t>
+              <a:rPr lang="en-US" dirty="0"/>
+              <a:t>• sensitivity ( </a:t>
+            </a:r>
+            <a:r>
+              <a:rPr lang="en-US" dirty="0" err="1"/>
+              <a:t>priklad</a:t>
+            </a:r>
+            <a:r>
+              <a:rPr lang="en-US" dirty="0"/>
+              <a:t>: top secret data)</a:t>
             </a:r>
           </a:p>
           <a:p>
@@ -8968,8 +10289,75 @@
               </a:defRPr>
             </a:pPr>
             <a:r>
+              <a:rPr lang="en-US" dirty="0"/>
+              <a:t>• </a:t>
+            </a:r>
+            <a:r>
+              <a:rPr dirty="0"/>
+              <a:t>owner, department</a:t>
+            </a:r>
+          </a:p>
+          <a:p>
+            <a:pPr>
+              <a:spcAft>
+                <a:spcPts val="200"/>
+              </a:spcAft>
+              <a:defRPr sz="1250">
+                <a:solidFill>
+                  <a:srgbClr val="0F172A"/>
+                </a:solidFill>
+                <a:latin typeface="Arial"/>
+              </a:defRPr>
+            </a:pPr>
+            <a:r>
+              <a:rPr dirty="0"/>
+              <a:t>• </a:t>
+            </a:r>
+            <a:r>
+              <a:rPr dirty="0" err="1"/>
+              <a:t>valid_from</a:t>
+            </a:r>
+            <a:r>
+              <a:rPr dirty="0"/>
+              <a:t> / </a:t>
+            </a:r>
+            <a:r>
+              <a:rPr dirty="0" err="1"/>
+              <a:t>valid_to</a:t>
+            </a:r>
+            <a:endParaRPr dirty="0"/>
+          </a:p>
+          <a:p>
+            <a:pPr>
+              <a:spcAft>
+                <a:spcPts val="200"/>
+              </a:spcAft>
+              <a:defRPr sz="1250">
+                <a:solidFill>
+                  <a:srgbClr val="0F172A"/>
+                </a:solidFill>
+                <a:latin typeface="Arial"/>
+              </a:defRPr>
+            </a:pPr>
+            <a:r>
+              <a:rPr dirty="0"/>
               <a:t>• retention policy</a:t>
             </a:r>
+            <a:endParaRPr lang="en-US" dirty="0"/>
+          </a:p>
+          <a:p>
+            <a:pPr>
+              <a:spcAft>
+                <a:spcPts val="200"/>
+              </a:spcAft>
+              <a:defRPr sz="1250">
+                <a:solidFill>
+                  <a:srgbClr val="0F172A"/>
+                </a:solidFill>
+                <a:latin typeface="Arial"/>
+              </a:defRPr>
+            </a:pPr>
+            <a:endParaRPr dirty="0"/>
           </a:p>
         </p:txBody>
       </p:sp>
@@ -9131,59 +10519,6 @@
             </a:pPr>
             <a:r>
               <a:t>• 5. auditovať dokumenty použité v odpovedi</a:t>
-            </a:r>
-          </a:p>
-        </p:txBody>
-      </p:sp>
-      <p:sp>
-        <p:nvSpPr>
-          <p:cNvPr id="10" name="Rounded Rectangle 9"/>
-          <p:cNvSpPr/>
-          <p:nvPr/>
-        </p:nvSpPr>
-        <p:spPr>
-          <a:xfrm>
-            <a:off x="868680" y="5989320"/>
-            <a:ext cx="10287000" cy="411480"/>
-          </a:xfrm>
-          <a:prstGeom prst="roundRect">
-            <a:avLst/>
-          </a:prstGeom>
-          <a:solidFill>
-            <a:srgbClr val="DC2626"/>
-          </a:solidFill>
-          <a:ln>
-            <a:noFill/>
-          </a:ln>
-        </p:spPr>
-        <p:style>
-          <a:lnRef idx="1">
-            <a:schemeClr val="accent1"/>
-          </a:lnRef>
-          <a:fillRef idx="3">
-            <a:schemeClr val="accent1"/>
-          </a:fillRef>
-          <a:effectRef idx="2">
-            <a:schemeClr val="accent1"/>
-          </a:effectRef>
-          <a:fontRef idx="minor">
-            <a:schemeClr val="lt1"/>
-          </a:fontRef>
-        </p:style>
-        <p:txBody>
-          <a:bodyPr wrap="square" rtlCol="0" anchor="ctr"/>
-          <a:lstStyle/>
-          <a:p>
-            <a:pPr algn="ctr">
-              <a:defRPr sz="1250" b="1">
-                <a:solidFill>
-                  <a:srgbClr val="FFFFFF"/>
-                </a:solidFill>
-                <a:latin typeface="Arial"/>
-              </a:defRPr>
-            </a:pPr>
-            <a:r>
-              <a:t>Nesprávny vzor: retrieve všetko → nech model vyfiltruje. Správny vzor: filter pred retrievalom.</a:t>
             </a:r>
           </a:p>
         </p:txBody>
@@ -9467,8 +10802,8 @@
         </p:nvSpPr>
         <p:spPr>
           <a:xfrm>
-            <a:off x="786384" y="1435607"/>
-            <a:ext cx="2450592" cy="4270248"/>
+            <a:off x="786384" y="1436603"/>
+            <a:ext cx="2514600" cy="1982594"/>
           </a:xfrm>
           <a:prstGeom prst="rect">
             <a:avLst/>
@@ -9490,8 +10825,13 @@
               </a:defRPr>
             </a:pPr>
             <a:r>
+              <a:rPr dirty="0"/>
               <a:t>Security controls</a:t>
             </a:r>
+            <a:br>
+              <a:rPr lang="en-US" dirty="0"/>
+            </a:br>
+            <a:endParaRPr lang="en-US" dirty="0"/>
           </a:p>
           <a:p>
             <a:pPr>
@@ -9506,6 +10846,7 @@
               </a:defRPr>
             </a:pPr>
             <a:r>
+              <a:rPr lang="en-US" dirty="0"/>
               <a:t>• Entra ID a delegated identity</a:t>
             </a:r>
           </a:p>
@@ -9522,8 +10863,53 @@
               </a:defRPr>
             </a:pPr>
             <a:r>
-              <a:t>• policy enforcement pred tools</a:t>
-            </a:r>
+              <a:rPr lang="en-US" dirty="0"/>
+              <a:t>•</a:t>
+            </a:r>
+            <a:r>
+              <a:rPr lang="sk-SK" dirty="0"/>
+              <a:t> </a:t>
+            </a:r>
+            <a:r>
+              <a:rPr lang="sk-SK" dirty="0" err="1"/>
+              <a:t>Authorizacia</a:t>
+            </a:r>
+            <a:r>
+              <a:rPr lang="sk-SK" dirty="0"/>
+              <a:t> </a:t>
+            </a:r>
+            <a:r>
+              <a:rPr lang="sk-SK" dirty="0" err="1"/>
+              <a:t>setup</a:t>
+            </a:r>
+            <a:br>
+              <a:rPr lang="sk-SK" dirty="0"/>
+            </a:br>
+            <a:r>
+              <a:rPr lang="en-US" dirty="0"/>
+              <a:t>•</a:t>
+            </a:r>
+            <a:r>
+              <a:rPr lang="sk-SK" dirty="0"/>
+              <a:t> </a:t>
+            </a:r>
+            <a:r>
+              <a:rPr lang="en-US" dirty="0"/>
+              <a:t>network isolation </a:t>
+            </a:r>
+            <a:r>
+              <a:rPr lang="en-US" dirty="0" err="1"/>
+              <a:t>podľa</a:t>
+            </a:r>
+            <a:r>
+              <a:rPr lang="en-US" dirty="0"/>
+              <a:t> </a:t>
+            </a:r>
+            <a:r>
+              <a:rPr lang="en-US" dirty="0" err="1"/>
+              <a:t>citlivosti</a:t>
+            </a:r>
+            <a:endParaRPr lang="sk-SK" dirty="0"/>
           </a:p>
           <a:p>
             <a:pPr>
@@ -9538,7 +10924,8 @@
               </a:defRPr>
             </a:pPr>
             <a:r>
-              <a:t>• DLP / PII / secrets redaction</a:t>
+              <a:rPr lang="en-US" dirty="0"/>
+              <a:t>• policy enforcement pred tools</a:t>
             </a:r>
           </a:p>
           <a:p>
@@ -9554,7 +10941,8 @@
               </a:defRPr>
             </a:pPr>
             <a:r>
-              <a:t>• tool allowlist a approval gates</a:t>
+              <a:rPr dirty="0"/>
+              <a:t>• DLP / PII / secrets redaction</a:t>
             </a:r>
           </a:p>
           <a:p>
@@ -9570,8 +10958,39 @@
               </a:defRPr>
             </a:pPr>
             <a:r>
-              <a:t>• network isolation podľa citlivosti</a:t>
-            </a:r>
+              <a:rPr dirty="0"/>
+              <a:t>• tool allowlist a approval gates</a:t>
+            </a:r>
+          </a:p>
+          <a:p>
+            <a:pPr>
+              <a:spcAft>
+                <a:spcPts val="200"/>
+              </a:spcAft>
+              <a:defRPr sz="1250">
+                <a:solidFill>
+                  <a:srgbClr val="0F172A"/>
+                </a:solidFill>
+                <a:latin typeface="Arial"/>
+              </a:defRPr>
+            </a:pPr>
+            <a:r>
+              <a:rPr dirty="0"/>
+              <a:t>•</a:t>
+            </a:r>
+            <a:r>
+              <a:rPr lang="sk-SK" dirty="0"/>
+              <a:t> </a:t>
+            </a:r>
+            <a:r>
+              <a:rPr lang="sk-SK" dirty="0" err="1"/>
+              <a:t>verifikators</a:t>
+            </a:r>
+            <a:r>
+              <a:rPr lang="sk-SK" dirty="0"/>
+              <a:t> odpovedi</a:t>
+            </a:r>
+            <a:endParaRPr dirty="0"/>
           </a:p>
         </p:txBody>
       </p:sp>
@@ -9630,7 +11049,7 @@
         <p:spPr>
           <a:xfrm>
             <a:off x="3758184" y="1435607"/>
-            <a:ext cx="2450592" cy="4270248"/>
+            <a:ext cx="2450592" cy="1556836"/>
           </a:xfrm>
           <a:prstGeom prst="rect">
             <a:avLst/>
@@ -9652,6 +11071,7 @@
               </a:defRPr>
             </a:pPr>
             <a:r>
+              <a:rPr dirty="0"/>
               <a:t>Governance</a:t>
             </a:r>
           </a:p>
@@ -9668,6 +11088,7 @@
               </a:defRPr>
             </a:pPr>
             <a:r>
+              <a:rPr dirty="0"/>
               <a:t>• business owner pre use case</a:t>
             </a:r>
           </a:p>
@@ -9684,8 +11105,14 @@
               </a:defRPr>
             </a:pPr>
             <a:r>
-              <a:t>• data owner pre zdroj</a:t>
-            </a:r>
+              <a:rPr dirty="0"/>
+              <a:t>• data owner pre </a:t>
+            </a:r>
+            <a:r>
+              <a:rPr dirty="0" err="1"/>
+              <a:t>zdroj</a:t>
+            </a:r>
+            <a:endParaRPr dirty="0"/>
           </a:p>
           <a:p>
             <a:pPr>
@@ -9700,6 +11127,7 @@
               </a:defRPr>
             </a:pPr>
             <a:r>
+              <a:rPr dirty="0"/>
               <a:t>• AI/platform owner</a:t>
             </a:r>
           </a:p>
@@ -9716,6 +11144,7 @@
               </a:defRPr>
             </a:pPr>
             <a:r>
+              <a:rPr dirty="0"/>
               <a:t>• risk/compliance review</a:t>
             </a:r>
           </a:p>
@@ -9732,8 +11161,30 @@
               </a:defRPr>
             </a:pPr>
             <a:r>
-              <a:t>• change management pre modely a prompty</a:t>
-            </a:r>
+              <a:rPr dirty="0"/>
+              <a:t>• change management pre </a:t>
+            </a:r>
+            <a:r>
+              <a:rPr dirty="0" err="1"/>
+              <a:t>modely</a:t>
+            </a:r>
+            <a:r>
+              <a:rPr lang="sk-SK" dirty="0"/>
+              <a:t>, </a:t>
+            </a:r>
+            <a:r>
+              <a:rPr lang="sk-SK" dirty="0" err="1"/>
+              <a:t>sources</a:t>
+            </a:r>
+            <a:r>
+              <a:rPr dirty="0"/>
+              <a:t> a </a:t>
+            </a:r>
+            <a:r>
+              <a:rPr dirty="0" err="1"/>
+              <a:t>prompty</a:t>
+            </a:r>
+            <a:endParaRPr dirty="0"/>
           </a:p>
         </p:txBody>
       </p:sp>
@@ -9791,8 +11242,8 @@
         </p:nvSpPr>
         <p:spPr>
           <a:xfrm>
-            <a:off x="6729984" y="1435607"/>
-            <a:ext cx="4416552" cy="1287532"/>
+            <a:off x="6729984" y="1389887"/>
+            <a:ext cx="4416552" cy="1895391"/>
           </a:xfrm>
           <a:prstGeom prst="rect">
             <a:avLst/>
@@ -9860,6 +11311,7 @@
               <a:rPr dirty="0"/>
               <a:t>• model a prompt template version</a:t>
             </a:r>
+            <a:endParaRPr lang="en-US" dirty="0"/>
           </a:p>
           <a:p>
             <a:pPr>
@@ -9874,8 +11326,24 @@
               </a:defRPr>
             </a:pPr>
             <a:r>
-              <a:rPr dirty="0"/>
-              <a:t>• tool calls a source systems</a:t>
+              <a:rPr lang="en-US" dirty="0"/>
+              <a:t>• </a:t>
+            </a:r>
+            <a:r>
+              <a:rPr lang="en-US" dirty="0" err="1"/>
+              <a:t>spotrebovane</a:t>
+            </a:r>
+            <a:r>
+              <a:rPr lang="en-US" dirty="0"/>
+              <a:t> </a:t>
+            </a:r>
+            <a:r>
+              <a:rPr lang="en-US" dirty="0" err="1"/>
+              <a:t>tokeny</a:t>
+            </a:r>
+            <a:r>
+              <a:rPr lang="en-US" dirty="0"/>
+              <a:t> input/output</a:t>
             </a:r>
           </a:p>
           <a:p>
@@ -9891,9 +11359,14 @@
               </a:defRPr>
             </a:pPr>
             <a:r>
-              <a:rPr dirty="0"/>
-              <a:t>• document ids/chunk ids</a:t>
-            </a:r>
+              <a:rPr lang="en-US" dirty="0"/>
+              <a:t>• session Q&amp;A </a:t>
+            </a:r>
+            <a:r>
+              <a:rPr lang="en-US" dirty="0" err="1"/>
+              <a:t>anonymizovane</a:t>
+            </a:r>
+            <a:endParaRPr dirty="0"/>
           </a:p>
           <a:p>
             <a:pPr>
@@ -9909,8 +11382,57 @@
             </a:pPr>
             <a:r>
               <a:rPr dirty="0"/>
+              <a:t>• tool calls a source systems</a:t>
+            </a:r>
+          </a:p>
+          <a:p>
+            <a:pPr>
+              <a:spcAft>
+                <a:spcPts val="200"/>
+              </a:spcAft>
+              <a:defRPr sz="1150">
+                <a:solidFill>
+                  <a:srgbClr val="0F172A"/>
+                </a:solidFill>
+                <a:latin typeface="Arial"/>
+              </a:defRPr>
+            </a:pPr>
+            <a:r>
+              <a:rPr dirty="0"/>
+              <a:t>• document ids/chunk ids</a:t>
+            </a:r>
+          </a:p>
+          <a:p>
+            <a:pPr>
+              <a:spcAft>
+                <a:spcPts val="200"/>
+              </a:spcAft>
+              <a:defRPr sz="1150">
+                <a:solidFill>
+                  <a:srgbClr val="0F172A"/>
+                </a:solidFill>
+                <a:latin typeface="Arial"/>
+              </a:defRPr>
+            </a:pPr>
+            <a:r>
+              <a:rPr dirty="0"/>
               <a:t>• authorization decision a scoring result</a:t>
             </a:r>
+            <a:endParaRPr lang="en-US" dirty="0"/>
+          </a:p>
+          <a:p>
+            <a:pPr>
+              <a:spcAft>
+                <a:spcPts val="200"/>
+              </a:spcAft>
+              <a:defRPr sz="1150">
+                <a:solidFill>
+                  <a:srgbClr val="0F172A"/>
+                </a:solidFill>
+                <a:latin typeface="Arial"/>
+              </a:defRPr>
+            </a:pPr>
+            <a:endParaRPr dirty="0"/>
           </a:p>
         </p:txBody>
       </p:sp>
@@ -10555,11 +12077,19 @@
             </a:pPr>
             <a:r>
               <a:rPr lang="en-US" dirty="0"/>
-              <a:t>• Pou</a:t>
+              <a:t>• </a:t>
             </a:r>
             <a:r>
               <a:rPr lang="sk-SK" dirty="0"/>
-              <a:t>žiť aj pri cache odpovedi</a:t>
+              <a:t>p</a:t>
+            </a:r>
+            <a:r>
+              <a:rPr lang="en-US" dirty="0" err="1"/>
+              <a:t>ou</a:t>
+            </a:r>
+            <a:r>
+              <a:rPr lang="sk-SK" dirty="0"/>
+              <a:t>žiť aj pri cache odpovedi - CAG</a:t>
             </a:r>
             <a:endParaRPr lang="en-US" dirty="0"/>
           </a:p>
@@ -10620,7 +12150,7 @@
         <p:spPr>
           <a:xfrm>
             <a:off x="4306824" y="1435607"/>
-            <a:ext cx="2999232" cy="2428870"/>
+            <a:ext cx="2999232" cy="2210862"/>
           </a:xfrm>
           <a:prstGeom prst="rect">
             <a:avLst/>
@@ -10688,23 +12218,6 @@
             <a:r>
               <a:rPr dirty="0"/>
               <a:t>• source coverage</a:t>
-            </a:r>
-          </a:p>
-          <a:p>
-            <a:pPr>
-              <a:spcAft>
-                <a:spcPts val="200"/>
-              </a:spcAft>
-              <a:defRPr sz="1250">
-                <a:solidFill>
-                  <a:srgbClr val="0F172A"/>
-                </a:solidFill>
-                <a:latin typeface="Arial"/>
-              </a:defRPr>
-            </a:pPr>
-            <a:r>
-              <a:rPr dirty="0"/>
-              <a:t>• authorization risk</a:t>
             </a:r>
           </a:p>
           <a:p>
@@ -10973,59 +12486,6 @@
             </a:pPr>
             <a:r>
               <a:t>• auth mismatch → hard block</a:t>
-            </a:r>
-          </a:p>
-        </p:txBody>
-      </p:sp>
-      <p:sp>
-        <p:nvSpPr>
-          <p:cNvPr id="10" name="Rounded Rectangle 9"/>
-          <p:cNvSpPr/>
-          <p:nvPr/>
-        </p:nvSpPr>
-        <p:spPr>
-          <a:xfrm>
-            <a:off x="1143000" y="5897880"/>
-            <a:ext cx="9829800" cy="411480"/>
-          </a:xfrm>
-          <a:prstGeom prst="roundRect">
-            <a:avLst/>
-          </a:prstGeom>
-          <a:solidFill>
-            <a:srgbClr val="143053"/>
-          </a:solidFill>
-          <a:ln>
-            <a:noFill/>
-          </a:ln>
-        </p:spPr>
-        <p:style>
-          <a:lnRef idx="1">
-            <a:schemeClr val="accent1"/>
-          </a:lnRef>
-          <a:fillRef idx="3">
-            <a:schemeClr val="accent1"/>
-          </a:fillRef>
-          <a:effectRef idx="2">
-            <a:schemeClr val="accent1"/>
-          </a:effectRef>
-          <a:fontRef idx="minor">
-            <a:schemeClr val="lt1"/>
-          </a:fontRef>
-        </p:style>
-        <p:txBody>
-          <a:bodyPr wrap="square" rtlCol="0" anchor="ctr"/>
-          <a:lstStyle/>
-          <a:p>
-            <a:pPr algn="ctr">
-              <a:defRPr sz="1250" b="1">
-                <a:solidFill>
-                  <a:srgbClr val="FFFFFF"/>
-                </a:solidFill>
-                <a:latin typeface="Arial"/>
-              </a:defRPr>
-            </a:pPr>
-            <a:r>
-              <a:t>Human-in-the-loop je kvalitatívna a riziková kontrola. Nie je náhradou za autorizáciu.</a:t>
             </a:r>
           </a:p>
         </p:txBody>
@@ -11737,8 +13197,22 @@
               </a:defRPr>
             </a:pPr>
             <a:r>
-              <a:t>On-prem / lokálne modely</a:t>
-            </a:r>
+              <a:rPr dirty="0"/>
+              <a:t>On-prem / </a:t>
+            </a:r>
+            <a:r>
+              <a:rPr dirty="0" err="1"/>
+              <a:t>lokálne</a:t>
+            </a:r>
+            <a:r>
+              <a:rPr dirty="0"/>
+              <a:t> </a:t>
+            </a:r>
+            <a:r>
+              <a:rPr dirty="0" err="1"/>
+              <a:t>modely</a:t>
+            </a:r>
+            <a:endParaRPr dirty="0"/>
           </a:p>
         </p:txBody>
       </p:sp>
@@ -12593,7 +14067,7 @@
         <p:spPr>
           <a:xfrm>
             <a:off x="2688336" y="1938528"/>
-            <a:ext cx="1307592" cy="1984248"/>
+            <a:ext cx="1307592" cy="1135567"/>
           </a:xfrm>
           <a:prstGeom prst="rect">
             <a:avLst/>
@@ -12615,6 +14089,7 @@
               </a:defRPr>
             </a:pPr>
             <a:r>
+              <a:rPr dirty="0"/>
               <a:t>PoC</a:t>
             </a:r>
           </a:p>
@@ -12631,8 +14106,106 @@
               </a:defRPr>
             </a:pPr>
             <a:r>
-              <a:t>• overený permission-aware RAG, citácie, základný audit</a:t>
-            </a:r>
+              <a:rPr dirty="0"/>
+              <a:t>• </a:t>
+            </a:r>
+            <a:r>
+              <a:rPr lang="sk-SK" dirty="0"/>
+              <a:t>overenie </a:t>
+            </a:r>
+            <a:r>
+              <a:rPr lang="sk-SK" dirty="0" err="1"/>
+              <a:t>arch</a:t>
+            </a:r>
+            <a:r>
+              <a:rPr lang="en-US" dirty="0"/>
+              <a:t>it</a:t>
+            </a:r>
+            <a:r>
+              <a:rPr lang="sk-SK" dirty="0" err="1"/>
+              <a:t>ektúr</a:t>
+            </a:r>
+            <a:r>
+              <a:rPr lang="en-US" dirty="0"/>
+              <a:t>i</a:t>
+            </a:r>
+            <a:endParaRPr lang="sk-SK" dirty="0"/>
+          </a:p>
+          <a:p>
+            <a:pPr>
+              <a:spcAft>
+                <a:spcPts val="200"/>
+              </a:spcAft>
+              <a:defRPr sz="1019">
+                <a:solidFill>
+                  <a:srgbClr val="0F172A"/>
+                </a:solidFill>
+                <a:latin typeface="Arial"/>
+              </a:defRPr>
+            </a:pPr>
+            <a:r>
+              <a:rPr lang="en-US" dirty="0"/>
+              <a:t>• </a:t>
+            </a:r>
+            <a:r>
+              <a:rPr dirty="0" err="1"/>
+              <a:t>overený</a:t>
+            </a:r>
+            <a:r>
+              <a:rPr dirty="0"/>
+              <a:t> permission-aware RAG, </a:t>
+            </a:r>
+            <a:r>
+              <a:rPr dirty="0" err="1"/>
+              <a:t>citácie</a:t>
+            </a:r>
+            <a:r>
+              <a:rPr dirty="0"/>
+              <a:t>, </a:t>
+            </a:r>
+            <a:r>
+              <a:rPr dirty="0" err="1"/>
+              <a:t>základný</a:t>
+            </a:r>
+            <a:r>
+              <a:rPr dirty="0"/>
+              <a:t> audit</a:t>
+            </a:r>
+            <a:endParaRPr lang="sk-SK" dirty="0"/>
+          </a:p>
+          <a:p>
+            <a:pPr>
+              <a:spcAft>
+                <a:spcPts val="200"/>
+              </a:spcAft>
+              <a:defRPr sz="1019">
+                <a:solidFill>
+                  <a:srgbClr val="0F172A"/>
+                </a:solidFill>
+                <a:latin typeface="Arial"/>
+              </a:defRPr>
+            </a:pPr>
+            <a:r>
+              <a:rPr lang="en-US" dirty="0"/>
+              <a:t>•</a:t>
+            </a:r>
+            <a:r>
+              <a:rPr lang="sk-SK" dirty="0"/>
+              <a:t> </a:t>
+            </a:r>
+            <a:r>
+              <a:rPr lang="sk-SK" dirty="0" err="1"/>
+              <a:t>auth</a:t>
+            </a:r>
+            <a:r>
+              <a:rPr lang="sk-SK" dirty="0"/>
+              <a:t>, </a:t>
+            </a:r>
+            <a:r>
+              <a:rPr lang="sk-SK" dirty="0" err="1"/>
+              <a:t>authZ</a:t>
+            </a:r>
+            <a:endParaRPr lang="sk-SK" dirty="0"/>
           </a:p>
         </p:txBody>
       </p:sp>
@@ -12726,7 +14299,7 @@
         <p:spPr>
           <a:xfrm>
             <a:off x="4544568" y="1938528"/>
-            <a:ext cx="1307592" cy="1984248"/>
+            <a:ext cx="1307592" cy="1423595"/>
           </a:xfrm>
           <a:prstGeom prst="rect">
             <a:avLst/>
@@ -12748,6 +14321,7 @@
               </a:defRPr>
             </a:pPr>
             <a:r>
+              <a:rPr dirty="0"/>
               <a:t>MVP</a:t>
             </a:r>
           </a:p>
@@ -12764,8 +14338,96 @@
               </a:defRPr>
             </a:pPr>
             <a:r>
-              <a:t>• použiteľný asistent pre obmedzenú skupinu</a:t>
-            </a:r>
+              <a:rPr dirty="0"/>
+              <a:t>• </a:t>
+            </a:r>
+            <a:r>
+              <a:rPr dirty="0" err="1"/>
+              <a:t>použiteľný</a:t>
+            </a:r>
+            <a:r>
+              <a:rPr dirty="0"/>
+              <a:t> </a:t>
+            </a:r>
+            <a:r>
+              <a:rPr dirty="0" err="1"/>
+              <a:t>asistent</a:t>
+            </a:r>
+            <a:r>
+              <a:rPr dirty="0"/>
+              <a:t> pre </a:t>
+            </a:r>
+            <a:r>
+              <a:rPr dirty="0" err="1"/>
+              <a:t>obmedzenú</a:t>
+            </a:r>
+            <a:r>
+              <a:rPr dirty="0"/>
+              <a:t> </a:t>
+            </a:r>
+            <a:r>
+              <a:rPr dirty="0" err="1"/>
+              <a:t>skupinu</a:t>
+            </a:r>
+            <a:endParaRPr lang="en-US" dirty="0"/>
+          </a:p>
+          <a:p>
+            <a:pPr>
+              <a:spcAft>
+                <a:spcPts val="200"/>
+              </a:spcAft>
+              <a:defRPr sz="1019">
+                <a:solidFill>
+                  <a:srgbClr val="0F172A"/>
+                </a:solidFill>
+                <a:latin typeface="Arial"/>
+              </a:defRPr>
+            </a:pPr>
+            <a:r>
+              <a:rPr lang="en-US" dirty="0"/>
+              <a:t>• </a:t>
+            </a:r>
+            <a:r>
+              <a:rPr lang="en-US" dirty="0" err="1"/>
+              <a:t>definovanie</a:t>
+            </a:r>
+            <a:r>
+              <a:rPr lang="en-US" dirty="0"/>
+              <a:t> </a:t>
+            </a:r>
+            <a:r>
+              <a:rPr lang="en-US" dirty="0" err="1"/>
+              <a:t>minimalnych</a:t>
+            </a:r>
+            <a:r>
+              <a:rPr lang="en-US" dirty="0"/>
+              <a:t> </a:t>
+            </a:r>
+            <a:r>
+              <a:rPr lang="en-US" dirty="0" err="1"/>
+              <a:t>acceptacnych</a:t>
+            </a:r>
+            <a:r>
+              <a:rPr lang="en-US" dirty="0"/>
+              <a:t> </a:t>
+            </a:r>
+            <a:r>
+              <a:rPr lang="en-US" dirty="0" err="1"/>
+              <a:t>kriteri</a:t>
+            </a:r>
+            <a:r>
+              <a:rPr lang="en-US" dirty="0"/>
+              <a:t> pre </a:t>
+            </a:r>
+            <a:r>
+              <a:rPr lang="en-US" dirty="0" err="1"/>
+              <a:t>produkciu</a:t>
+            </a:r>
+            <a:r>
+              <a:rPr lang="sk-SK" dirty="0"/>
+              <a:t>, SLA</a:t>
+            </a:r>
+            <a:endParaRPr dirty="0"/>
           </a:p>
         </p:txBody>
       </p:sp>
@@ -12859,7 +14521,7 @@
         <p:spPr>
           <a:xfrm>
             <a:off x="6400800" y="1938528"/>
-            <a:ext cx="1307592" cy="1984248"/>
+            <a:ext cx="1307592" cy="1554785"/>
           </a:xfrm>
           <a:prstGeom prst="rect">
             <a:avLst/>
@@ -12881,6 +14543,7 @@
               </a:defRPr>
             </a:pPr>
             <a:r>
+              <a:rPr dirty="0"/>
               <a:t>Pilot</a:t>
             </a:r>
           </a:p>
@@ -12897,8 +14560,104 @@
               </a:defRPr>
             </a:pPr>
             <a:r>
-              <a:t>• metriky kvality, bezpečnosti, adopcie a costov</a:t>
-            </a:r>
+              <a:rPr dirty="0"/>
+              <a:t>• </a:t>
+            </a:r>
+            <a:r>
+              <a:rPr dirty="0" err="1"/>
+              <a:t>metriky</a:t>
+            </a:r>
+            <a:r>
+              <a:rPr dirty="0"/>
+              <a:t> </a:t>
+            </a:r>
+            <a:r>
+              <a:rPr dirty="0" err="1"/>
+              <a:t>kvality</a:t>
+            </a:r>
+            <a:r>
+              <a:rPr dirty="0"/>
+              <a:t>, </a:t>
+            </a:r>
+            <a:r>
+              <a:rPr dirty="0" err="1"/>
+              <a:t>bezpečnosti</a:t>
+            </a:r>
+            <a:r>
+              <a:rPr dirty="0"/>
+              <a:t>, </a:t>
+            </a:r>
+            <a:r>
+              <a:rPr dirty="0" err="1"/>
+              <a:t>adopcie</a:t>
+            </a:r>
+            <a:r>
+              <a:rPr lang="en-US" dirty="0"/>
+              <a:t> </a:t>
+            </a:r>
+            <a:r>
+              <a:rPr dirty="0"/>
+              <a:t>a </a:t>
+            </a:r>
+            <a:r>
+              <a:rPr dirty="0" err="1"/>
+              <a:t>costov</a:t>
+            </a:r>
+            <a:br>
+              <a:rPr lang="en-US" dirty="0"/>
+            </a:br>
+            <a:r>
+              <a:rPr lang="en-US" dirty="0"/>
+              <a:t>•  </a:t>
+            </a:r>
+            <a:r>
+              <a:rPr lang="en-US" dirty="0" err="1"/>
+              <a:t>otestovanie</a:t>
+            </a:r>
+            <a:r>
+              <a:rPr lang="en-US" dirty="0"/>
+              <a:t> </a:t>
+            </a:r>
+            <a:r>
+              <a:rPr lang="sk-SK" dirty="0" err="1"/>
+              <a:t>kriterii</a:t>
+            </a:r>
+            <a:r>
+              <a:rPr lang="sk-SK" dirty="0"/>
+              <a:t> -</a:t>
+            </a:r>
+            <a:r>
+              <a:rPr lang="en-US" dirty="0"/>
+              <a:t> scalability, disaster recovery</a:t>
+            </a:r>
+            <a:br>
+              <a:rPr lang="en-US" dirty="0"/>
+            </a:br>
+            <a:r>
+              <a:rPr lang="en-US" dirty="0"/>
+              <a:t>• </a:t>
+            </a:r>
+            <a:r>
+              <a:rPr lang="en-US" dirty="0" err="1"/>
+              <a:t>overenie</a:t>
+            </a:r>
+            <a:r>
+              <a:rPr lang="en-US" dirty="0"/>
+              <a:t> </a:t>
+            </a:r>
+            <a:r>
+              <a:rPr lang="en-US" dirty="0" err="1"/>
+              <a:t>rie</a:t>
+            </a:r>
+            <a:r>
+              <a:rPr lang="sk-SK" dirty="0" err="1"/>
+              <a:t>šenia</a:t>
+            </a:r>
+            <a:r>
+              <a:rPr lang="sk-SK" dirty="0"/>
+              <a:t> incidentov</a:t>
+            </a:r>
+            <a:endParaRPr dirty="0"/>
           </a:p>
         </p:txBody>
       </p:sp>
@@ -13125,7 +14884,7 @@
         <p:spPr>
           <a:xfrm>
             <a:off x="10113263" y="1938528"/>
-            <a:ext cx="1307592" cy="1984248"/>
+            <a:ext cx="1307592" cy="770596"/>
           </a:xfrm>
           <a:prstGeom prst="rect">
             <a:avLst/>
@@ -13147,8 +14906,10 @@
               </a:defRPr>
             </a:pPr>
             <a:r>
+              <a:rPr dirty="0" err="1"/>
               <a:t>Rozvoj</a:t>
             </a:r>
+            <a:endParaRPr dirty="0"/>
           </a:p>
           <a:p>
             <a:pPr>
@@ -13163,8 +14924,42 @@
               </a:defRPr>
             </a:pPr>
             <a:r>
-              <a:t>• nové zdroje a use cases cez governance proces</a:t>
-            </a:r>
+              <a:rPr dirty="0"/>
+              <a:t>• </a:t>
+            </a:r>
+            <a:r>
+              <a:rPr dirty="0" err="1"/>
+              <a:t>nové</a:t>
+            </a:r>
+            <a:r>
+              <a:rPr dirty="0"/>
+              <a:t> </a:t>
+            </a:r>
+            <a:r>
+              <a:rPr dirty="0" err="1"/>
+              <a:t>zdroje</a:t>
+            </a:r>
+            <a:r>
+              <a:rPr lang="en-US" dirty="0"/>
+              <a:t>/models</a:t>
+            </a:r>
+            <a:r>
+              <a:rPr dirty="0"/>
+              <a:t> a use cases </a:t>
+            </a:r>
+            <a:r>
+              <a:rPr dirty="0" err="1"/>
+              <a:t>cez</a:t>
+            </a:r>
+            <a:r>
+              <a:rPr dirty="0"/>
+              <a:t> governance </a:t>
+            </a:r>
+            <a:r>
+              <a:rPr dirty="0" err="1"/>
+              <a:t>proces</a:t>
+            </a:r>
+            <a:endParaRPr dirty="0"/>
           </a:p>
         </p:txBody>
       </p:sp>
@@ -13704,4 +15499,319 @@
   </a:objectDefaults>
   <a:extraClrSchemeLst/>
 </a:theme>
+</file>
+
+<file path=ppt/theme/theme2.xml><?xml version="1.0" encoding="utf-8"?>
+<a:theme xmlns:a="http://schemas.openxmlformats.org/drawingml/2006/main" name="Office Theme">
+  <a:themeElements>
+    <a:clrScheme name="Office">
+      <a:dk1>
+        <a:sysClr val="windowText" lastClr="000000"/>
+      </a:dk1>
+      <a:lt1>
+        <a:sysClr val="window" lastClr="FFFFFF"/>
+      </a:lt1>
+      <a:dk2>
+        <a:srgbClr val="0E2841"/>
+      </a:dk2>
+      <a:lt2>
+        <a:srgbClr val="E8E8E8"/>
+      </a:lt2>
+      <a:accent1>
+        <a:srgbClr val="156082"/>
+      </a:accent1>
+      <a:accent2>
+        <a:srgbClr val="E97132"/>
+      </a:accent2>
+      <a:accent3>
+        <a:srgbClr val="196B24"/>
+      </a:accent3>
+      <a:accent4>
+        <a:srgbClr val="0F9ED5"/>
+      </a:accent4>
+      <a:accent5>
+        <a:srgbClr val="A02B93"/>
+      </a:accent5>
+      <a:accent6>
+        <a:srgbClr val="4EA72E"/>
+      </a:accent6>
+      <a:hlink>
+        <a:srgbClr val="467886"/>
+      </a:hlink>
+      <a:folHlink>
+        <a:srgbClr val="96607D"/>
+      </a:folHlink>
+    </a:clrScheme>
+    <a:fontScheme name="Office">
+      <a:majorFont>
+        <a:latin typeface="Aptos Display" panose="02110004020202020204"/>
+        <a:ea typeface=""/>
+        <a:cs typeface=""/>
+        <a:font script="Jpan" typeface="游ゴシック Light"/>
+        <a:font script="Hang" typeface="맑은 고딕"/>
+        <a:font script="Hans" typeface="等线 Light"/>
+        <a:font script="Hant" typeface="新細明體"/>
+        <a:font script="Arab" typeface="Times New Roman"/>
+        <a:font script="Hebr" typeface="Times New Roman"/>
+        <a:font script="Thai" typeface="Angsana New"/>
+        <a:font script="Ethi" typeface="Nyala"/>
+        <a:font script="Beng" typeface="Vrinda"/>
+        <a:font script="Gujr" typeface="Shruti"/>
+        <a:font script="Khmr" typeface="MoolBoran"/>
+        <a:font script="Knda" typeface="Tunga"/>
+        <a:font script="Guru" typeface="Raavi"/>
+        <a:font script="Cans" typeface="Euphemia"/>
+        <a:font script="Cher" typeface="Plantagenet Cherokee"/>
+        <a:font script="Yiii" typeface="Microsoft Yi Baiti"/>
+        <a:font script="Tibt" typeface="Microsoft Himalaya"/>
+        <a:font script="Thaa" typeface="MV Boli"/>
+        <a:font script="Deva" typeface="Mangal"/>
+        <a:font script="Telu" typeface="Gautami"/>
+        <a:font script="Taml" typeface="Latha"/>
+        <a:font script="Syrc" typeface="Estrangelo Edessa"/>
+        <a:font script="Orya" typeface="Kalinga"/>
+        <a:font script="Mlym" typeface="Kartika"/>
+        <a:font script="Laoo" typeface="DokChampa"/>
+        <a:font script="Sinh" typeface="Iskoola Pota"/>
+        <a:font script="Mong" typeface="Mongolian Baiti"/>
+        <a:font script="Viet" typeface="Times New Roman"/>
+        <a:font script="Uigh" typeface="Microsoft Uighur"/>
+        <a:font script="Geor" typeface="Sylfaen"/>
+        <a:font script="Armn" typeface="Arial"/>
+        <a:font script="Bugi" typeface="Leelawadee UI"/>
+        <a:font script="Bopo" typeface="Microsoft JhengHei"/>
+        <a:font script="Java" typeface="Javanese Text"/>
+        <a:font script="Lisu" typeface="Segoe UI"/>
+        <a:font script="Mymr" typeface="Myanmar Text"/>
+        <a:font script="Nkoo" typeface="Ebrima"/>
+        <a:font script="Olck" typeface="Nirmala UI"/>
+        <a:font script="Osma" typeface="Ebrima"/>
+        <a:font script="Phag" typeface="Phagspa"/>
+        <a:font script="Syrn" typeface="Estrangelo Edessa"/>
+        <a:font script="Syrj" typeface="Estrangelo Edessa"/>
+        <a:font script="Syre" typeface="Estrangelo Edessa"/>
+        <a:font script="Sora" typeface="Nirmala UI"/>
+        <a:font script="Tale" typeface="Microsoft Tai Le"/>
+        <a:font script="Talu" typeface="Microsoft New Tai Lue"/>
+        <a:font script="Tfng" typeface="Ebrima"/>
+      </a:majorFont>
+      <a:minorFont>
+        <a:latin typeface="Aptos" panose="02110004020202020204"/>
+        <a:ea typeface=""/>
+        <a:cs typeface=""/>
+        <a:font script="Jpan" typeface="游ゴシック"/>
+        <a:font script="Hang" typeface="맑은 고딕"/>
+        <a:font script="Hans" typeface="等线"/>
+        <a:font script="Hant" typeface="新細明體"/>
+        <a:font script="Arab" typeface="Arial"/>
+        <a:font script="Hebr" typeface="Arial"/>
+        <a:font script="Thai" typeface="Cordia New"/>
+        <a:font script="Ethi" typeface="Nyala"/>
+        <a:font script="Beng" typeface="Vrinda"/>
+        <a:font script="Gujr" typeface="Shruti"/>
+        <a:font script="Khmr" typeface="DaunPenh"/>
+        <a:font script="Knda" typeface="Tunga"/>
+        <a:font script="Guru" typeface="Raavi"/>
+        <a:font script="Cans" typeface="Euphemia"/>
+        <a:font script="Cher" typeface="Plantagenet Cherokee"/>
+        <a:font script="Yiii" typeface="Microsoft Yi Baiti"/>
+        <a:font script="Tibt" typeface="Microsoft Himalaya"/>
+        <a:font script="Thaa" typeface="MV Boli"/>
+        <a:font script="Deva" typeface="Mangal"/>
+        <a:font script="Telu" typeface="Gautami"/>
+        <a:font script="Taml" typeface="Latha"/>
+        <a:font script="Syrc" typeface="Estrangelo Edessa"/>
+        <a:font script="Orya" typeface="Kalinga"/>
+        <a:font script="Mlym" typeface="Kartika"/>
+        <a:font script="Laoo" typeface="DokChampa"/>
+        <a:font script="Sinh" typeface="Iskoola Pota"/>
+        <a:font script="Mong" typeface="Mongolian Baiti"/>
+        <a:font script="Viet" typeface="Arial"/>
+        <a:font script="Uigh" typeface="Microsoft Uighur"/>
+        <a:font script="Geor" typeface="Sylfaen"/>
+        <a:font script="Armn" typeface="Arial"/>
+        <a:font script="Bugi" typeface="Leelawadee UI"/>
+        <a:font script="Bopo" typeface="Microsoft JhengHei"/>
+        <a:font script="Java" typeface="Javanese Text"/>
+        <a:font script="Lisu" typeface="Segoe UI"/>
+        <a:font script="Mymr" typeface="Myanmar Text"/>
+        <a:font script="Nkoo" typeface="Ebrima"/>
+        <a:font script="Olck" typeface="Nirmala UI"/>
+        <a:font script="Osma" typeface="Ebrima"/>
+        <a:font script="Phag" typeface="Phagspa"/>
+        <a:font script="Syrn" typeface="Estrangelo Edessa"/>
+        <a:font script="Syrj" typeface="Estrangelo Edessa"/>
+        <a:font script="Syre" typeface="Estrangelo Edessa"/>
+        <a:font script="Sora" typeface="Nirmala UI"/>
+        <a:font script="Tale" typeface="Microsoft Tai Le"/>
+        <a:font script="Talu" typeface="Microsoft New Tai Lue"/>
+        <a:font script="Tfng" typeface="Ebrima"/>
+      </a:minorFont>
+    </a:fontScheme>
+    <a:fmtScheme name="Office">
+      <a:fillStyleLst>
+        <a:solidFill>
+          <a:schemeClr val="phClr"/>
+        </a:solidFill>
+        <a:gradFill rotWithShape="1">
+          <a:gsLst>
+            <a:gs pos="0">
+              <a:schemeClr val="phClr">
+                <a:lumMod val="110000"/>
+                <a:satMod val="105000"/>
+                <a:tint val="67000"/>
+              </a:schemeClr>
+            </a:gs>
+            <a:gs pos="50000">
+              <a:schemeClr val="phClr">
+                <a:lumMod val="105000"/>
+                <a:satMod val="103000"/>
+                <a:tint val="73000"/>
+              </a:schemeClr>
+            </a:gs>
+            <a:gs pos="100000">
+              <a:schemeClr val="phClr">
+                <a:lumMod val="105000"/>
+                <a:satMod val="109000"/>
+                <a:tint val="81000"/>
+              </a:schemeClr>
+            </a:gs>
+          </a:gsLst>
+          <a:lin ang="5400000" scaled="0"/>
+        </a:gradFill>
+        <a:gradFill rotWithShape="1">
+          <a:gsLst>
+            <a:gs pos="0">
+              <a:schemeClr val="phClr">
+                <a:satMod val="103000"/>
+                <a:lumMod val="102000"/>
+                <a:tint val="94000"/>
+              </a:schemeClr>
+            </a:gs>
+            <a:gs pos="50000">
+              <a:schemeClr val="phClr">
+                <a:satMod val="110000"/>
+                <a:lumMod val="100000"/>
+                <a:shade val="100000"/>
+              </a:schemeClr>
+            </a:gs>
+            <a:gs pos="100000">
+              <a:schemeClr val="phClr">
+                <a:lumMod val="99000"/>
+                <a:satMod val="120000"/>
+                <a:shade val="78000"/>
+              </a:schemeClr>
+            </a:gs>
+          </a:gsLst>
+          <a:lin ang="5400000" scaled="0"/>
+        </a:gradFill>
+      </a:fillStyleLst>
+      <a:lnStyleLst>
+        <a:ln w="12700" cap="flat" cmpd="sng" algn="ctr">
+          <a:solidFill>
+            <a:schemeClr val="phClr"/>
+          </a:solidFill>
+          <a:prstDash val="solid"/>
+          <a:miter lim="800000"/>
+        </a:ln>
+        <a:ln w="19050" cap="flat" cmpd="sng" algn="ctr">
+          <a:solidFill>
+            <a:schemeClr val="phClr"/>
+          </a:solidFill>
+          <a:prstDash val="solid"/>
+          <a:miter lim="800000"/>
+        </a:ln>
+        <a:ln w="25400" cap="flat" cmpd="sng" algn="ctr">
+          <a:solidFill>
+            <a:schemeClr val="phClr"/>
+          </a:solidFill>
+          <a:prstDash val="solid"/>
+          <a:miter lim="800000"/>
+        </a:ln>
+      </a:lnStyleLst>
+      <a:effectStyleLst>
+        <a:effectStyle>
+          <a:effectLst/>
+        </a:effectStyle>
+        <a:effectStyle>
+          <a:effectLst/>
+        </a:effectStyle>
+        <a:effectStyle>
+          <a:effectLst>
+            <a:outerShdw blurRad="57150" dist="19050" dir="5400000" algn="ctr" rotWithShape="0">
+              <a:srgbClr val="000000">
+                <a:alpha val="63000"/>
+              </a:srgbClr>
+            </a:outerShdw>
+          </a:effectLst>
+        </a:effectStyle>
+      </a:effectStyleLst>
+      <a:bgFillStyleLst>
+        <a:solidFill>
+          <a:schemeClr val="phClr"/>
+        </a:solidFill>
+        <a:solidFill>
+          <a:schemeClr val="phClr">
+            <a:tint val="95000"/>
+            <a:satMod val="170000"/>
+          </a:schemeClr>
+        </a:solidFill>
+        <a:gradFill rotWithShape="1">
+          <a:gsLst>
+            <a:gs pos="0">
+              <a:schemeClr val="phClr">
+                <a:tint val="93000"/>
+                <a:satMod val="150000"/>
+                <a:shade val="98000"/>
+                <a:lumMod val="102000"/>
+              </a:schemeClr>
+            </a:gs>
+            <a:gs pos="50000">
+              <a:schemeClr val="phClr">
+                <a:tint val="98000"/>
+                <a:satMod val="130000"/>
+                <a:shade val="90000"/>
+                <a:lumMod val="103000"/>
+              </a:schemeClr>
+            </a:gs>
+            <a:gs pos="100000">
+              <a:schemeClr val="phClr">
+                <a:shade val="63000"/>
+                <a:satMod val="120000"/>
+              </a:schemeClr>
+            </a:gs>
+          </a:gsLst>
+          <a:lin ang="5400000" scaled="0"/>
+        </a:gradFill>
+      </a:bgFillStyleLst>
+    </a:fmtScheme>
+  </a:themeElements>
+  <a:objectDefaults>
+    <a:lnDef>
+      <a:spPr/>
+      <a:bodyPr/>
+      <a:lstStyle/>
+      <a:style>
+        <a:lnRef idx="2">
+          <a:schemeClr val="accent1"/>
+        </a:lnRef>
+        <a:fillRef idx="0">
+          <a:schemeClr val="accent1"/>
+        </a:fillRef>
+        <a:effectRef idx="1">
+          <a:schemeClr val="accent1"/>
+        </a:effectRef>
+        <a:fontRef idx="minor">
+          <a:schemeClr val="tx1"/>
+        </a:fontRef>
+      </a:style>
+    </a:lnDef>
+  </a:objectDefaults>
+  <a:extraClrSchemeLst/>
+  <a:extLst>
+    <a:ext uri="{05A4C25C-085E-4340-85A3-A5531E510DB2}">
+      <thm15:themeFamily xmlns:thm15="http://schemas.microsoft.com/office/thememl/2012/main" name="Office Theme" id="{2E142A2C-CD16-42D6-873A-C26D2A0506FA}" vid="{1BDDFF52-6CD6-40A5-AB3C-68EB2F1E4D0A}"/>
+    </a:ext>
+  </a:extLst>
+</a:theme>
 </file>